--- a/docs/source/AGILAB_UAV_Full_Tour_Slides.pptx
+++ b/docs/source/AGILAB_UAV_Full_Tour_Slides.pptx
@@ -3087,7 +3087,7 @@
     <p:bg>
       <p:bgPr>
         <a:solidFill>
-          <a:srgbClr val="F7F3EB"/>
+          <a:srgbClr val="0B131D"/>
         </a:solidFill>
         <a:effectLst/>
       </p:bgPr>
@@ -3101,73 +3101,23 @@
       <p:grpSpPr/>
       <p:sp>
         <p:nvSpPr>
-          <p:cNvPr id="2" name="TextBox 1"/>
-          <p:cNvSpPr txBox="1"/>
-          <p:nvPr/>
-        </p:nvSpPr>
-        <p:spPr>
-          <a:xfrm>
-            <a:off x="640080" y="502920"/>
-            <a:ext cx="10972800" cy="1005840"/>
+          <p:cNvPr id="2" name="Rectangle 1"/>
+          <p:cNvSpPr/>
+          <p:nvPr/>
+        </p:nvSpPr>
+        <p:spPr>
+          <a:xfrm>
+            <a:off x="0" y="0"/>
+            <a:ext cx="12191695" cy="146304"/>
           </a:xfrm>
           <a:prstGeom prst="rect">
             <a:avLst/>
           </a:prstGeom>
-          <a:noFill/>
-        </p:spPr>
-        <p:txBody>
-          <a:bodyPr wrap="none">
-            <a:spAutoFit/>
-          </a:bodyPr>
-          <a:lstStyle/>
-          <a:p>
-            <a:r>
-              <a:rPr sz="2800" b="1">
-                <a:solidFill>
-                  <a:srgbClr val="2D5C7A"/>
-                </a:solidFill>
-              </a:rPr>
-              <a:t>AGILAB Full Tour</a:t>
-            </a:r>
-          </a:p>
-          <a:p>
-            <a:pPr>
-              <a:spcBef>
-                <a:spcPts val="400"/>
-              </a:spcBef>
-            </a:pPr>
-            <a:r>
-              <a:rPr sz="1400">
-                <a:solidFill>
-                  <a:srgbClr val="5B6268"/>
-                </a:solidFill>
-              </a:rPr>
-              <a:t>Slideshow companion for the `uav_relay_queue_project` public workflow story</a:t>
-            </a:r>
-          </a:p>
-        </p:txBody>
-      </p:sp>
-      <p:sp>
-        <p:nvSpPr>
-          <p:cNvPr id="3" name="Rounded Rectangle 2"/>
-          <p:cNvSpPr/>
-          <p:nvPr/>
-        </p:nvSpPr>
-        <p:spPr>
-          <a:xfrm>
-            <a:off x="640080" y="1463040"/>
-            <a:ext cx="10972800" cy="4480560"/>
-          </a:xfrm>
-          <a:prstGeom prst="roundRect">
-            <a:avLst/>
-          </a:prstGeom>
-          <a:solidFill>
-            <a:srgbClr val="FFFBF5"/>
-          </a:solidFill>
-          <a:ln w="19050">
-            <a:solidFill>
-              <a:srgbClr val="DCCEBF"/>
-            </a:solidFill>
+          <a:solidFill>
+            <a:srgbClr val="E86E3A"/>
+          </a:solidFill>
+          <a:ln>
+            <a:noFill/>
           </a:ln>
         </p:spPr>
         <p:style>
@@ -3194,14 +3144,448 @@
       </p:sp>
       <p:sp>
         <p:nvSpPr>
-          <p:cNvPr id="4" name="TextBox 3"/>
+          <p:cNvPr id="3" name="Oval 2"/>
+          <p:cNvSpPr/>
+          <p:nvPr/>
+        </p:nvSpPr>
+        <p:spPr>
+          <a:xfrm>
+            <a:off x="10607040" y="-731520"/>
+            <a:ext cx="2560320" cy="2560320"/>
+          </a:xfrm>
+          <a:prstGeom prst="ellipse">
+            <a:avLst/>
+          </a:prstGeom>
+          <a:solidFill>
+            <a:srgbClr val="12202D"/>
+          </a:solidFill>
+          <a:ln>
+            <a:noFill/>
+          </a:ln>
+        </p:spPr>
+        <p:style>
+          <a:lnRef idx="1">
+            <a:schemeClr val="accent1"/>
+          </a:lnRef>
+          <a:fillRef idx="3">
+            <a:schemeClr val="accent1"/>
+          </a:fillRef>
+          <a:effectRef idx="2">
+            <a:schemeClr val="accent1"/>
+          </a:effectRef>
+          <a:fontRef idx="minor">
+            <a:schemeClr val="lt1"/>
+          </a:fontRef>
+        </p:style>
+        <p:txBody>
+          <a:bodyPr rtlCol="0" anchor="ctr"/>
+          <a:lstStyle/>
+          <a:p>
+            <a:pPr algn="ctr"/>
+          </a:p>
+        </p:txBody>
+      </p:sp>
+      <p:sp>
+        <p:nvSpPr>
+          <p:cNvPr id="4" name="Oval 3"/>
+          <p:cNvSpPr/>
+          <p:nvPr/>
+        </p:nvSpPr>
+        <p:spPr>
+          <a:xfrm>
+            <a:off x="9966960" y="5120640"/>
+            <a:ext cx="2103120" cy="2103120"/>
+          </a:xfrm>
+          <a:prstGeom prst="ellipse">
+            <a:avLst/>
+          </a:prstGeom>
+          <a:solidFill>
+            <a:srgbClr val="1C2D3D"/>
+          </a:solidFill>
+          <a:ln>
+            <a:noFill/>
+          </a:ln>
+        </p:spPr>
+        <p:style>
+          <a:lnRef idx="1">
+            <a:schemeClr val="accent1"/>
+          </a:lnRef>
+          <a:fillRef idx="3">
+            <a:schemeClr val="accent1"/>
+          </a:fillRef>
+          <a:effectRef idx="2">
+            <a:schemeClr val="accent1"/>
+          </a:effectRef>
+          <a:fontRef idx="minor">
+            <a:schemeClr val="lt1"/>
+          </a:fontRef>
+        </p:style>
+        <p:txBody>
+          <a:bodyPr rtlCol="0" anchor="ctr"/>
+          <a:lstStyle/>
+          <a:p>
+            <a:pPr algn="ctr"/>
+          </a:p>
+        </p:txBody>
+      </p:sp>
+      <p:sp>
+        <p:nvSpPr>
+          <p:cNvPr id="5" name="TextBox 4"/>
           <p:cNvSpPr txBox="1"/>
           <p:nvPr/>
         </p:nvSpPr>
         <p:spPr>
           <a:xfrm>
-            <a:off x="914400" y="1828800"/>
-            <a:ext cx="10424160" cy="3474720"/>
+            <a:off x="777240" y="658368"/>
+            <a:ext cx="3657600" cy="228600"/>
+          </a:xfrm>
+          <a:prstGeom prst="rect">
+            <a:avLst/>
+          </a:prstGeom>
+          <a:noFill/>
+        </p:spPr>
+        <p:txBody>
+          <a:bodyPr wrap="none">
+            <a:spAutoFit/>
+          </a:bodyPr>
+          <a:lstStyle/>
+          <a:p>
+            <a:pPr algn="l">
+              <a:spcBef>
+                <a:spcPts val="0"/>
+              </a:spcBef>
+              <a:spcAft>
+                <a:spcPts val="0"/>
+              </a:spcAft>
+            </a:pPr>
+            <a:r>
+              <a:rPr sz="1000" b="1">
+                <a:solidFill>
+                  <a:srgbClr val="54B9D6"/>
+                </a:solidFill>
+                <a:latin typeface="Aptos"/>
+              </a:rPr>
+              <a:t>PUBLIC WORKFLOW STORY</a:t>
+            </a:r>
+          </a:p>
+        </p:txBody>
+      </p:sp>
+      <p:sp>
+        <p:nvSpPr>
+          <p:cNvPr id="6" name="TextBox 5"/>
+          <p:cNvSpPr txBox="1"/>
+          <p:nvPr/>
+        </p:nvSpPr>
+        <p:spPr>
+          <a:xfrm>
+            <a:off x="777240" y="868680"/>
+            <a:ext cx="4846320" cy="1371600"/>
+          </a:xfrm>
+          <a:prstGeom prst="rect">
+            <a:avLst/>
+          </a:prstGeom>
+          <a:noFill/>
+        </p:spPr>
+        <p:txBody>
+          <a:bodyPr wrap="square" anchor="t">
+            <a:spAutoFit/>
+          </a:bodyPr>
+          <a:lstStyle/>
+          <a:p>
+            <a:pPr algn="l">
+              <a:spcAft>
+                <a:spcPts val="300"/>
+              </a:spcAft>
+            </a:pPr>
+            <a:r>
+              <a:rPr sz="2800" b="1">
+                <a:solidFill>
+                  <a:srgbClr val="F4F0EB"/>
+                </a:solidFill>
+                <a:latin typeface="Aptos Display"/>
+              </a:rPr>
+              <a:t>AGILAB Full Tour</a:t>
+            </a:r>
+          </a:p>
+          <a:p>
+            <a:pPr algn="l">
+              <a:spcBef>
+                <a:spcPts val="200"/>
+              </a:spcBef>
+            </a:pPr>
+            <a:r>
+              <a:rPr sz="1300" b="0">
+                <a:solidFill>
+                  <a:srgbClr val="ABB7C4"/>
+                </a:solidFill>
+                <a:latin typeface="Aptos"/>
+              </a:rPr>
+              <a:t>Slideshow companion for the `uav_relay_queue_project` public workflow story.</a:t>
+            </a:r>
+          </a:p>
+        </p:txBody>
+      </p:sp>
+      <p:sp>
+        <p:nvSpPr>
+          <p:cNvPr id="7" name="Rounded Rectangle 6"/>
+          <p:cNvSpPr/>
+          <p:nvPr/>
+        </p:nvSpPr>
+        <p:spPr>
+          <a:xfrm>
+            <a:off x="777240" y="1965960"/>
+            <a:ext cx="1143000" cy="310896"/>
+          </a:xfrm>
+          <a:prstGeom prst="roundRect">
+            <a:avLst/>
+          </a:prstGeom>
+          <a:solidFill>
+            <a:srgbClr val="E86E3A"/>
+          </a:solidFill>
+          <a:ln>
+            <a:noFill/>
+          </a:ln>
+        </p:spPr>
+        <p:style>
+          <a:lnRef idx="1">
+            <a:schemeClr val="accent1"/>
+          </a:lnRef>
+          <a:fillRef idx="3">
+            <a:schemeClr val="accent1"/>
+          </a:fillRef>
+          <a:effectRef idx="2">
+            <a:schemeClr val="accent1"/>
+          </a:effectRef>
+          <a:fontRef idx="minor">
+            <a:schemeClr val="lt1"/>
+          </a:fontRef>
+        </p:style>
+        <p:txBody>
+          <a:bodyPr rtlCol="0" anchor="ctr" wrap="none"/>
+          <a:lstStyle/>
+          <a:p>
+            <a:pPr algn="ctr"/>
+            <a:r>
+              <a:rPr sz="900" b="1">
+                <a:solidFill>
+                  <a:srgbClr val="F4F0EB"/>
+                </a:solidFill>
+                <a:latin typeface="Aptos"/>
+              </a:rPr>
+              <a:t>PROJECT</a:t>
+            </a:r>
+          </a:p>
+        </p:txBody>
+      </p:sp>
+      <p:sp>
+        <p:nvSpPr>
+          <p:cNvPr id="8" name="Rounded Rectangle 7"/>
+          <p:cNvSpPr/>
+          <p:nvPr/>
+        </p:nvSpPr>
+        <p:spPr>
+          <a:xfrm>
+            <a:off x="2029968" y="1965960"/>
+            <a:ext cx="1362456" cy="310896"/>
+          </a:xfrm>
+          <a:prstGeom prst="roundRect">
+            <a:avLst/>
+          </a:prstGeom>
+          <a:solidFill>
+            <a:srgbClr val="54B9D6"/>
+          </a:solidFill>
+          <a:ln>
+            <a:noFill/>
+          </a:ln>
+        </p:spPr>
+        <p:style>
+          <a:lnRef idx="1">
+            <a:schemeClr val="accent1"/>
+          </a:lnRef>
+          <a:fillRef idx="3">
+            <a:schemeClr val="accent1"/>
+          </a:fillRef>
+          <a:effectRef idx="2">
+            <a:schemeClr val="accent1"/>
+          </a:effectRef>
+          <a:fontRef idx="minor">
+            <a:schemeClr val="lt1"/>
+          </a:fontRef>
+        </p:style>
+        <p:txBody>
+          <a:bodyPr rtlCol="0" anchor="ctr" wrap="none"/>
+          <a:lstStyle/>
+          <a:p>
+            <a:pPr algn="ctr"/>
+            <a:r>
+              <a:rPr sz="900" b="1">
+                <a:solidFill>
+                  <a:srgbClr val="F4F0EB"/>
+                </a:solidFill>
+                <a:latin typeface="Aptos"/>
+              </a:rPr>
+              <a:t>ORCHESTRATE</a:t>
+            </a:r>
+          </a:p>
+        </p:txBody>
+      </p:sp>
+      <p:sp>
+        <p:nvSpPr>
+          <p:cNvPr id="9" name="Rounded Rectangle 8"/>
+          <p:cNvSpPr/>
+          <p:nvPr/>
+        </p:nvSpPr>
+        <p:spPr>
+          <a:xfrm>
+            <a:off x="3502152" y="1965960"/>
+            <a:ext cx="1143000" cy="310896"/>
+          </a:xfrm>
+          <a:prstGeom prst="roundRect">
+            <a:avLst/>
+          </a:prstGeom>
+          <a:solidFill>
+            <a:srgbClr val="F5BF5B"/>
+          </a:solidFill>
+          <a:ln>
+            <a:noFill/>
+          </a:ln>
+        </p:spPr>
+        <p:style>
+          <a:lnRef idx="1">
+            <a:schemeClr val="accent1"/>
+          </a:lnRef>
+          <a:fillRef idx="3">
+            <a:schemeClr val="accent1"/>
+          </a:fillRef>
+          <a:effectRef idx="2">
+            <a:schemeClr val="accent1"/>
+          </a:effectRef>
+          <a:fontRef idx="minor">
+            <a:schemeClr val="lt1"/>
+          </a:fontRef>
+        </p:style>
+        <p:txBody>
+          <a:bodyPr rtlCol="0" anchor="ctr" wrap="none"/>
+          <a:lstStyle/>
+          <a:p>
+            <a:pPr algn="ctr"/>
+            <a:r>
+              <a:rPr sz="900" b="1">
+                <a:solidFill>
+                  <a:srgbClr val="F4F0EB"/>
+                </a:solidFill>
+                <a:latin typeface="Aptos"/>
+              </a:rPr>
+              <a:t>PIPELINE</a:t>
+            </a:r>
+          </a:p>
+        </p:txBody>
+      </p:sp>
+      <p:sp>
+        <p:nvSpPr>
+          <p:cNvPr id="10" name="Rounded Rectangle 9"/>
+          <p:cNvSpPr/>
+          <p:nvPr/>
+        </p:nvSpPr>
+        <p:spPr>
+          <a:xfrm>
+            <a:off x="4754880" y="1965960"/>
+            <a:ext cx="1143000" cy="310896"/>
+          </a:xfrm>
+          <a:prstGeom prst="roundRect">
+            <a:avLst/>
+          </a:prstGeom>
+          <a:solidFill>
+            <a:srgbClr val="987EE0"/>
+          </a:solidFill>
+          <a:ln>
+            <a:noFill/>
+          </a:ln>
+        </p:spPr>
+        <p:style>
+          <a:lnRef idx="1">
+            <a:schemeClr val="accent1"/>
+          </a:lnRef>
+          <a:fillRef idx="3">
+            <a:schemeClr val="accent1"/>
+          </a:fillRef>
+          <a:effectRef idx="2">
+            <a:schemeClr val="accent1"/>
+          </a:effectRef>
+          <a:fontRef idx="minor">
+            <a:schemeClr val="lt1"/>
+          </a:fontRef>
+        </p:style>
+        <p:txBody>
+          <a:bodyPr rtlCol="0" anchor="ctr" wrap="none"/>
+          <a:lstStyle/>
+          <a:p>
+            <a:pPr algn="ctr"/>
+            <a:r>
+              <a:rPr sz="900" b="1">
+                <a:solidFill>
+                  <a:srgbClr val="F4F0EB"/>
+                </a:solidFill>
+                <a:latin typeface="Aptos"/>
+              </a:rPr>
+              <a:t>ANALYSIS</a:t>
+            </a:r>
+          </a:p>
+        </p:txBody>
+      </p:sp>
+      <p:sp>
+        <p:nvSpPr>
+          <p:cNvPr id="11" name="Rounded Rectangle 10"/>
+          <p:cNvSpPr/>
+          <p:nvPr/>
+        </p:nvSpPr>
+        <p:spPr>
+          <a:xfrm>
+            <a:off x="777240" y="2542032"/>
+            <a:ext cx="5212080" cy="786384"/>
+          </a:xfrm>
+          <a:prstGeom prst="roundRect">
+            <a:avLst/>
+          </a:prstGeom>
+          <a:solidFill>
+            <a:srgbClr val="1C2D3D"/>
+          </a:solidFill>
+          <a:ln w="15240">
+            <a:noFill/>
+          </a:ln>
+        </p:spPr>
+        <p:style>
+          <a:lnRef idx="1">
+            <a:schemeClr val="accent1"/>
+          </a:lnRef>
+          <a:fillRef idx="3">
+            <a:schemeClr val="accent1"/>
+          </a:fillRef>
+          <a:effectRef idx="2">
+            <a:schemeClr val="accent1"/>
+          </a:effectRef>
+          <a:fontRef idx="minor">
+            <a:schemeClr val="lt1"/>
+          </a:fontRef>
+        </p:style>
+        <p:txBody>
+          <a:bodyPr rtlCol="0" anchor="ctr"/>
+          <a:lstStyle/>
+          <a:p>
+            <a:pPr algn="ctr"/>
+          </a:p>
+        </p:txBody>
+      </p:sp>
+      <p:sp>
+        <p:nvSpPr>
+          <p:cNvPr id="12" name="TextBox 11"/>
+          <p:cNvSpPr txBox="1"/>
+          <p:nvPr/>
+        </p:nvSpPr>
+        <p:spPr>
+          <a:xfrm>
+            <a:off x="996696" y="2706624"/>
+            <a:ext cx="4773168" cy="566928"/>
           </a:xfrm>
           <a:prstGeom prst="rect">
             <a:avLst/>
@@ -3214,48 +3598,988 @@
           </a:bodyPr>
           <a:lstStyle/>
           <a:p>
+            <a:r>
+              <a:rPr sz="1200" b="0">
+                <a:solidFill>
+                  <a:srgbClr val="F4F0EB"/>
+                </a:solidFill>
+                <a:latin typeface="Aptos"/>
+              </a:rPr>
+              <a:t>Goal: show the four-page AGILAB story without asking the viewer to replay a hosted runtime or watch a video.</a:t>
+            </a:r>
+          </a:p>
+        </p:txBody>
+      </p:sp>
+      <p:sp>
+        <p:nvSpPr>
+          <p:cNvPr id="13" name="Rounded Rectangle 12"/>
+          <p:cNvSpPr/>
+          <p:nvPr/>
+        </p:nvSpPr>
+        <p:spPr>
+          <a:xfrm>
+            <a:off x="841248" y="3730752"/>
+            <a:ext cx="2423160" cy="1417320"/>
+          </a:xfrm>
+          <a:prstGeom prst="roundRect">
+            <a:avLst/>
+          </a:prstGeom>
+          <a:solidFill>
+            <a:srgbClr val="12202D"/>
+          </a:solidFill>
+          <a:ln>
+            <a:noFill/>
+          </a:ln>
+        </p:spPr>
+        <p:style>
+          <a:lnRef idx="1">
+            <a:schemeClr val="accent1"/>
+          </a:lnRef>
+          <a:fillRef idx="3">
+            <a:schemeClr val="accent1"/>
+          </a:fillRef>
+          <a:effectRef idx="2">
+            <a:schemeClr val="accent1"/>
+          </a:effectRef>
+          <a:fontRef idx="minor">
+            <a:schemeClr val="lt1"/>
+          </a:fontRef>
+        </p:style>
+        <p:txBody>
+          <a:bodyPr rtlCol="0" anchor="ctr"/>
+          <a:lstStyle/>
+          <a:p>
+            <a:pPr algn="ctr"/>
+          </a:p>
+        </p:txBody>
+      </p:sp>
+      <p:sp>
+        <p:nvSpPr>
+          <p:cNvPr id="14" name="Rounded Rectangle 13"/>
+          <p:cNvSpPr/>
+          <p:nvPr/>
+        </p:nvSpPr>
+        <p:spPr>
+          <a:xfrm>
+            <a:off x="777240" y="3657600"/>
+            <a:ext cx="2423160" cy="1417320"/>
+          </a:xfrm>
+          <a:prstGeom prst="roundRect">
+            <a:avLst/>
+          </a:prstGeom>
+          <a:solidFill>
+            <a:srgbClr val="F7F3EE"/>
+          </a:solidFill>
+          <a:ln w="15240">
+            <a:solidFill>
+              <a:srgbClr val="D6CCC1"/>
+            </a:solidFill>
+          </a:ln>
+        </p:spPr>
+        <p:style>
+          <a:lnRef idx="1">
+            <a:schemeClr val="accent1"/>
+          </a:lnRef>
+          <a:fillRef idx="3">
+            <a:schemeClr val="accent1"/>
+          </a:fillRef>
+          <a:effectRef idx="2">
+            <a:schemeClr val="accent1"/>
+          </a:effectRef>
+          <a:fontRef idx="minor">
+            <a:schemeClr val="lt1"/>
+          </a:fontRef>
+        </p:style>
+        <p:txBody>
+          <a:bodyPr rtlCol="0" anchor="ctr"/>
+          <a:lstStyle/>
+          <a:p>
+            <a:pPr algn="ctr"/>
+          </a:p>
+        </p:txBody>
+      </p:sp>
+      <p:sp>
+        <p:nvSpPr>
+          <p:cNvPr id="15" name="Rounded Rectangle 14"/>
+          <p:cNvSpPr/>
+          <p:nvPr/>
+        </p:nvSpPr>
+        <p:spPr>
+          <a:xfrm>
+            <a:off x="978408" y="3822192"/>
+            <a:ext cx="438912" cy="310896"/>
+          </a:xfrm>
+          <a:prstGeom prst="roundRect">
+            <a:avLst/>
+          </a:prstGeom>
+          <a:solidFill>
+            <a:srgbClr val="54B9D6"/>
+          </a:solidFill>
+          <a:ln>
+            <a:noFill/>
+          </a:ln>
+        </p:spPr>
+        <p:style>
+          <a:lnRef idx="1">
+            <a:schemeClr val="accent1"/>
+          </a:lnRef>
+          <a:fillRef idx="3">
+            <a:schemeClr val="accent1"/>
+          </a:fillRef>
+          <a:effectRef idx="2">
+            <a:schemeClr val="accent1"/>
+          </a:effectRef>
+          <a:fontRef idx="minor">
+            <a:schemeClr val="lt1"/>
+          </a:fontRef>
+        </p:style>
+        <p:txBody>
+          <a:bodyPr rtlCol="0" anchor="ctr" wrap="none"/>
+          <a:lstStyle/>
+          <a:p>
+            <a:pPr algn="ctr"/>
+            <a:r>
+              <a:rPr sz="900" b="1">
+                <a:solidFill>
+                  <a:srgbClr val="F4F0EB"/>
+                </a:solidFill>
+                <a:latin typeface="Aptos"/>
+              </a:rPr>
+              <a:t>A</a:t>
+            </a:r>
+          </a:p>
+        </p:txBody>
+      </p:sp>
+      <p:sp>
+        <p:nvSpPr>
+          <p:cNvPr id="16" name="TextBox 15"/>
+          <p:cNvSpPr txBox="1"/>
+          <p:nvPr/>
+        </p:nvSpPr>
+        <p:spPr>
+          <a:xfrm>
+            <a:off x="978408" y="4187952"/>
+            <a:ext cx="2020824" cy="685800"/>
+          </a:xfrm>
+          <a:prstGeom prst="rect">
+            <a:avLst/>
+          </a:prstGeom>
+          <a:noFill/>
+        </p:spPr>
+        <p:txBody>
+          <a:bodyPr wrap="square" anchor="t">
+            <a:spAutoFit/>
+          </a:bodyPr>
+          <a:lstStyle/>
+          <a:p>
             <a:pPr>
               <a:spcAft>
-                <a:spcPts val="800"/>
+                <a:spcPts val="300"/>
               </a:spcAft>
-              <a:defRPr sz="2200">
+            </a:pPr>
+            <a:r>
+              <a:rPr sz="1500" b="1">
                 <a:solidFill>
-                  <a:srgbClr val="212427"/>
+                  <a:srgbClr val="19212A"/>
                 </a:solidFill>
-              </a:defRPr>
-            </a:pPr>
-            <a:r>
-              <a:t>Goal: show the main AGILAB four-page story without asking the viewer to watch a hosted runtime or replay a video.</a:t>
-            </a:r>
-          </a:p>
+                <a:latin typeface="Aptos Display"/>
+              </a:rPr>
+              <a:t>Replayable path</a:t>
+            </a:r>
+          </a:p>
+          <a:p>
+            <a:r>
+              <a:rPr sz="1100" b="0">
+                <a:solidFill>
+                  <a:srgbClr val="57606D"/>
+                </a:solidFill>
+                <a:latin typeface="Aptos"/>
+              </a:rPr>
+              <a:t>The run is not just executable once; the workflow is made explicit.</a:t>
+            </a:r>
+          </a:p>
+        </p:txBody>
+      </p:sp>
+      <p:sp>
+        <p:nvSpPr>
+          <p:cNvPr id="17" name="Rounded Rectangle 16"/>
+          <p:cNvSpPr/>
+          <p:nvPr/>
+        </p:nvSpPr>
+        <p:spPr>
+          <a:xfrm>
+            <a:off x="3557016" y="3730752"/>
+            <a:ext cx="2423160" cy="1417320"/>
+          </a:xfrm>
+          <a:prstGeom prst="roundRect">
+            <a:avLst/>
+          </a:prstGeom>
+          <a:solidFill>
+            <a:srgbClr val="12202D"/>
+          </a:solidFill>
+          <a:ln>
+            <a:noFill/>
+          </a:ln>
+        </p:spPr>
+        <p:style>
+          <a:lnRef idx="1">
+            <a:schemeClr val="accent1"/>
+          </a:lnRef>
+          <a:fillRef idx="3">
+            <a:schemeClr val="accent1"/>
+          </a:fillRef>
+          <a:effectRef idx="2">
+            <a:schemeClr val="accent1"/>
+          </a:effectRef>
+          <a:fontRef idx="minor">
+            <a:schemeClr val="lt1"/>
+          </a:fontRef>
+        </p:style>
+        <p:txBody>
+          <a:bodyPr rtlCol="0" anchor="ctr"/>
+          <a:lstStyle/>
+          <a:p>
+            <a:pPr algn="ctr"/>
+          </a:p>
+        </p:txBody>
+      </p:sp>
+      <p:sp>
+        <p:nvSpPr>
+          <p:cNvPr id="18" name="Rounded Rectangle 17"/>
+          <p:cNvSpPr/>
+          <p:nvPr/>
+        </p:nvSpPr>
+        <p:spPr>
+          <a:xfrm>
+            <a:off x="3493008" y="3657600"/>
+            <a:ext cx="2423160" cy="1417320"/>
+          </a:xfrm>
+          <a:prstGeom prst="roundRect">
+            <a:avLst/>
+          </a:prstGeom>
+          <a:solidFill>
+            <a:srgbClr val="F7F3EE"/>
+          </a:solidFill>
+          <a:ln w="15240">
+            <a:solidFill>
+              <a:srgbClr val="D6CCC1"/>
+            </a:solidFill>
+          </a:ln>
+        </p:spPr>
+        <p:style>
+          <a:lnRef idx="1">
+            <a:schemeClr val="accent1"/>
+          </a:lnRef>
+          <a:fillRef idx="3">
+            <a:schemeClr val="accent1"/>
+          </a:fillRef>
+          <a:effectRef idx="2">
+            <a:schemeClr val="accent1"/>
+          </a:effectRef>
+          <a:fontRef idx="minor">
+            <a:schemeClr val="lt1"/>
+          </a:fontRef>
+        </p:style>
+        <p:txBody>
+          <a:bodyPr rtlCol="0" anchor="ctr"/>
+          <a:lstStyle/>
+          <a:p>
+            <a:pPr algn="ctr"/>
+          </a:p>
+        </p:txBody>
+      </p:sp>
+      <p:sp>
+        <p:nvSpPr>
+          <p:cNvPr id="19" name="Rounded Rectangle 18"/>
+          <p:cNvSpPr/>
+          <p:nvPr/>
+        </p:nvSpPr>
+        <p:spPr>
+          <a:xfrm>
+            <a:off x="3694176" y="3822192"/>
+            <a:ext cx="438912" cy="310896"/>
+          </a:xfrm>
+          <a:prstGeom prst="roundRect">
+            <a:avLst/>
+          </a:prstGeom>
+          <a:solidFill>
+            <a:srgbClr val="54B9D6"/>
+          </a:solidFill>
+          <a:ln>
+            <a:noFill/>
+          </a:ln>
+        </p:spPr>
+        <p:style>
+          <a:lnRef idx="1">
+            <a:schemeClr val="accent1"/>
+          </a:lnRef>
+          <a:fillRef idx="3">
+            <a:schemeClr val="accent1"/>
+          </a:fillRef>
+          <a:effectRef idx="2">
+            <a:schemeClr val="accent1"/>
+          </a:effectRef>
+          <a:fontRef idx="minor">
+            <a:schemeClr val="lt1"/>
+          </a:fontRef>
+        </p:style>
+        <p:txBody>
+          <a:bodyPr rtlCol="0" anchor="ctr" wrap="none"/>
+          <a:lstStyle/>
+          <a:p>
+            <a:pPr algn="ctr"/>
+            <a:r>
+              <a:rPr sz="900" b="1">
+                <a:solidFill>
+                  <a:srgbClr val="F4F0EB"/>
+                </a:solidFill>
+                <a:latin typeface="Aptos"/>
+              </a:rPr>
+              <a:t>B</a:t>
+            </a:r>
+          </a:p>
+        </p:txBody>
+      </p:sp>
+      <p:sp>
+        <p:nvSpPr>
+          <p:cNvPr id="20" name="TextBox 19"/>
+          <p:cNvSpPr txBox="1"/>
+          <p:nvPr/>
+        </p:nvSpPr>
+        <p:spPr>
+          <a:xfrm>
+            <a:off x="3694176" y="4187952"/>
+            <a:ext cx="2020824" cy="685800"/>
+          </a:xfrm>
+          <a:prstGeom prst="rect">
+            <a:avLst/>
+          </a:prstGeom>
+          <a:noFill/>
+        </p:spPr>
+        <p:txBody>
+          <a:bodyPr wrap="square" anchor="t">
+            <a:spAutoFit/>
+          </a:bodyPr>
+          <a:lstStyle/>
           <a:p>
             <a:pPr>
               <a:spcAft>
-                <a:spcPts val="800"/>
+                <a:spcPts val="300"/>
               </a:spcAft>
-              <a:defRPr sz="2200">
+            </a:pPr>
+            <a:r>
+              <a:rPr sz="1500" b="1">
                 <a:solidFill>
-                  <a:srgbClr val="212427"/>
+                  <a:srgbClr val="19212A"/>
                 </a:solidFill>
-              </a:defRPr>
-            </a:pPr>
-            <a:r>
-              <a:t>Scope: PROJECT -&gt; ORCHESTRATE -&gt; PIPELINE -&gt; ANALYSIS on `uav_relay_queue_project`.</a:t>
-            </a:r>
-          </a:p>
-          <a:p>
-            <a:pPr>
-              <a:spcAft>
-                <a:spcPts val="800"/>
-              </a:spcAft>
-              <a:defRPr sz="2200">
+                <a:latin typeface="Aptos Display"/>
+              </a:rPr>
+              <a:t>Readable payoff</a:t>
+            </a:r>
+          </a:p>
+          <a:p>
+            <a:r>
+              <a:rPr sz="1100" b="0">
                 <a:solidFill>
-                  <a:srgbClr val="212427"/>
+                  <a:srgbClr val="57606D"/>
                 </a:solidFill>
-              </a:defRPr>
-            </a:pPr>
-            <a:r>
-              <a:t>Keep the message stable: replayable workflow plus visible queue or route evidence.</a:t>
+                <a:latin typeface="Aptos"/>
+              </a:rPr>
+              <a:t>End on queue or route evidence that a technical reviewer can scan fast.</a:t>
+            </a:r>
+          </a:p>
+        </p:txBody>
+      </p:sp>
+      <p:sp>
+        <p:nvSpPr>
+          <p:cNvPr id="21" name="Rounded Rectangle 20"/>
+          <p:cNvSpPr/>
+          <p:nvPr/>
+        </p:nvSpPr>
+        <p:spPr>
+          <a:xfrm>
+            <a:off x="6647688" y="1152144"/>
+            <a:ext cx="4480560" cy="2240280"/>
+          </a:xfrm>
+          <a:prstGeom prst="roundRect">
+            <a:avLst/>
+          </a:prstGeom>
+          <a:solidFill>
+            <a:srgbClr val="12202D"/>
+          </a:solidFill>
+          <a:ln>
+            <a:noFill/>
+          </a:ln>
+        </p:spPr>
+        <p:style>
+          <a:lnRef idx="1">
+            <a:schemeClr val="accent1"/>
+          </a:lnRef>
+          <a:fillRef idx="3">
+            <a:schemeClr val="accent1"/>
+          </a:fillRef>
+          <a:effectRef idx="2">
+            <a:schemeClr val="accent1"/>
+          </a:effectRef>
+          <a:fontRef idx="minor">
+            <a:schemeClr val="lt1"/>
+          </a:fontRef>
+        </p:style>
+        <p:txBody>
+          <a:bodyPr rtlCol="0" anchor="ctr"/>
+          <a:lstStyle/>
+          <a:p>
+            <a:pPr algn="ctr"/>
+          </a:p>
+        </p:txBody>
+      </p:sp>
+      <p:sp>
+        <p:nvSpPr>
+          <p:cNvPr id="22" name="Rounded Rectangle 21"/>
+          <p:cNvSpPr/>
+          <p:nvPr/>
+        </p:nvSpPr>
+        <p:spPr>
+          <a:xfrm>
+            <a:off x="6583680" y="1078992"/>
+            <a:ext cx="4480560" cy="2240280"/>
+          </a:xfrm>
+          <a:prstGeom prst="roundRect">
+            <a:avLst/>
+          </a:prstGeom>
+          <a:solidFill>
+            <a:srgbClr val="F7F3EE"/>
+          </a:solidFill>
+          <a:ln w="15240">
+            <a:solidFill>
+              <a:srgbClr val="D6CCC1"/>
+            </a:solidFill>
+          </a:ln>
+        </p:spPr>
+        <p:style>
+          <a:lnRef idx="1">
+            <a:schemeClr val="accent1"/>
+          </a:lnRef>
+          <a:fillRef idx="3">
+            <a:schemeClr val="accent1"/>
+          </a:fillRef>
+          <a:effectRef idx="2">
+            <a:schemeClr val="accent1"/>
+          </a:effectRef>
+          <a:fontRef idx="minor">
+            <a:schemeClr val="lt1"/>
+          </a:fontRef>
+        </p:style>
+        <p:txBody>
+          <a:bodyPr rtlCol="0" anchor="ctr"/>
+          <a:lstStyle/>
+          <a:p>
+            <a:pPr algn="ctr"/>
+          </a:p>
+        </p:txBody>
+      </p:sp>
+      <p:pic>
+        <p:nvPicPr>
+          <p:cNvPr id="23" name="Picture 22" descr="image.png"/>
+          <p:cNvPicPr>
+            <a:picLocks noChangeAspect="1"/>
+          </p:cNvPicPr>
+          <p:nvPr/>
+        </p:nvPicPr>
+        <p:blipFill>
+          <a:blip r:embed="rId2"/>
+          <a:stretch>
+            <a:fillRect/>
+          </a:stretch>
+        </p:blipFill>
+        <p:spPr>
+          <a:xfrm>
+            <a:off x="6693408" y="1188720"/>
+            <a:ext cx="4261104" cy="2020824"/>
+          </a:xfrm>
+          <a:prstGeom prst="rect">
+            <a:avLst/>
+          </a:prstGeom>
+        </p:spPr>
+      </p:pic>
+      <p:sp>
+        <p:nvSpPr>
+          <p:cNvPr id="24" name="Rounded Rectangle 23"/>
+          <p:cNvSpPr/>
+          <p:nvPr/>
+        </p:nvSpPr>
+        <p:spPr>
+          <a:xfrm>
+            <a:off x="6766560" y="932688"/>
+            <a:ext cx="1097280" cy="310896"/>
+          </a:xfrm>
+          <a:prstGeom prst="roundRect">
+            <a:avLst/>
+          </a:prstGeom>
+          <a:solidFill>
+            <a:srgbClr val="E86E3A"/>
+          </a:solidFill>
+          <a:ln>
+            <a:noFill/>
+          </a:ln>
+        </p:spPr>
+        <p:style>
+          <a:lnRef idx="1">
+            <a:schemeClr val="accent1"/>
+          </a:lnRef>
+          <a:fillRef idx="3">
+            <a:schemeClr val="accent1"/>
+          </a:fillRef>
+          <a:effectRef idx="2">
+            <a:schemeClr val="accent1"/>
+          </a:effectRef>
+          <a:fontRef idx="minor">
+            <a:schemeClr val="lt1"/>
+          </a:fontRef>
+        </p:style>
+        <p:txBody>
+          <a:bodyPr rtlCol="0" anchor="ctr" wrap="none"/>
+          <a:lstStyle/>
+          <a:p>
+            <a:pPr algn="ctr"/>
+            <a:r>
+              <a:rPr sz="900" b="1">
+                <a:solidFill>
+                  <a:srgbClr val="F4F0EB"/>
+                </a:solidFill>
+                <a:latin typeface="Aptos"/>
+              </a:rPr>
+              <a:t>PROJECT</a:t>
+            </a:r>
+          </a:p>
+        </p:txBody>
+      </p:sp>
+      <p:sp>
+        <p:nvSpPr>
+          <p:cNvPr id="25" name="TextBox 24"/>
+          <p:cNvSpPr txBox="1"/>
+          <p:nvPr/>
+        </p:nvSpPr>
+        <p:spPr>
+          <a:xfrm>
+            <a:off x="6748272" y="2935224"/>
+            <a:ext cx="4151376" cy="201168"/>
+          </a:xfrm>
+          <a:prstGeom prst="rect">
+            <a:avLst/>
+          </a:prstGeom>
+          <a:noFill/>
+        </p:spPr>
+        <p:txBody>
+          <a:bodyPr wrap="none">
+            <a:spAutoFit/>
+          </a:bodyPr>
+          <a:lstStyle/>
+          <a:p>
+            <a:r>
+              <a:rPr sz="1000" b="1">
+                <a:solidFill>
+                  <a:srgbClr val="F4F0EB"/>
+                </a:solidFill>
+                <a:latin typeface="Aptos"/>
+              </a:rPr>
+              <a:t>App and scenario are visible from the start.</a:t>
+            </a:r>
+          </a:p>
+        </p:txBody>
+      </p:sp>
+      <p:sp>
+        <p:nvSpPr>
+          <p:cNvPr id="26" name="Rounded Rectangle 25"/>
+          <p:cNvSpPr/>
+          <p:nvPr/>
+        </p:nvSpPr>
+        <p:spPr>
+          <a:xfrm>
+            <a:off x="7150608" y="2770632"/>
+            <a:ext cx="4480560" cy="2240280"/>
+          </a:xfrm>
+          <a:prstGeom prst="roundRect">
+            <a:avLst/>
+          </a:prstGeom>
+          <a:solidFill>
+            <a:srgbClr val="12202D"/>
+          </a:solidFill>
+          <a:ln>
+            <a:noFill/>
+          </a:ln>
+        </p:spPr>
+        <p:style>
+          <a:lnRef idx="1">
+            <a:schemeClr val="accent1"/>
+          </a:lnRef>
+          <a:fillRef idx="3">
+            <a:schemeClr val="accent1"/>
+          </a:fillRef>
+          <a:effectRef idx="2">
+            <a:schemeClr val="accent1"/>
+          </a:effectRef>
+          <a:fontRef idx="minor">
+            <a:schemeClr val="lt1"/>
+          </a:fontRef>
+        </p:style>
+        <p:txBody>
+          <a:bodyPr rtlCol="0" anchor="ctr"/>
+          <a:lstStyle/>
+          <a:p>
+            <a:pPr algn="ctr"/>
+          </a:p>
+        </p:txBody>
+      </p:sp>
+      <p:sp>
+        <p:nvSpPr>
+          <p:cNvPr id="27" name="Rounded Rectangle 26"/>
+          <p:cNvSpPr/>
+          <p:nvPr/>
+        </p:nvSpPr>
+        <p:spPr>
+          <a:xfrm>
+            <a:off x="7086600" y="2697480"/>
+            <a:ext cx="4480560" cy="2240280"/>
+          </a:xfrm>
+          <a:prstGeom prst="roundRect">
+            <a:avLst/>
+          </a:prstGeom>
+          <a:solidFill>
+            <a:srgbClr val="F7F3EE"/>
+          </a:solidFill>
+          <a:ln w="15240">
+            <a:solidFill>
+              <a:srgbClr val="D6CCC1"/>
+            </a:solidFill>
+          </a:ln>
+        </p:spPr>
+        <p:style>
+          <a:lnRef idx="1">
+            <a:schemeClr val="accent1"/>
+          </a:lnRef>
+          <a:fillRef idx="3">
+            <a:schemeClr val="accent1"/>
+          </a:fillRef>
+          <a:effectRef idx="2">
+            <a:schemeClr val="accent1"/>
+          </a:effectRef>
+          <a:fontRef idx="minor">
+            <a:schemeClr val="lt1"/>
+          </a:fontRef>
+        </p:style>
+        <p:txBody>
+          <a:bodyPr rtlCol="0" anchor="ctr"/>
+          <a:lstStyle/>
+          <a:p>
+            <a:pPr algn="ctr"/>
+          </a:p>
+        </p:txBody>
+      </p:sp>
+      <p:pic>
+        <p:nvPicPr>
+          <p:cNvPr id="28" name="Picture 27" descr="image.png"/>
+          <p:cNvPicPr>
+            <a:picLocks noChangeAspect="1"/>
+          </p:cNvPicPr>
+          <p:nvPr/>
+        </p:nvPicPr>
+        <p:blipFill>
+          <a:blip r:embed="rId3"/>
+          <a:stretch>
+            <a:fillRect/>
+          </a:stretch>
+        </p:blipFill>
+        <p:spPr>
+          <a:xfrm>
+            <a:off x="7196328" y="2807208"/>
+            <a:ext cx="4261104" cy="2020824"/>
+          </a:xfrm>
+          <a:prstGeom prst="rect">
+            <a:avLst/>
+          </a:prstGeom>
+        </p:spPr>
+      </p:pic>
+      <p:sp>
+        <p:nvSpPr>
+          <p:cNvPr id="29" name="Rounded Rectangle 28"/>
+          <p:cNvSpPr/>
+          <p:nvPr/>
+        </p:nvSpPr>
+        <p:spPr>
+          <a:xfrm>
+            <a:off x="7269480" y="2551176"/>
+            <a:ext cx="1097280" cy="310896"/>
+          </a:xfrm>
+          <a:prstGeom prst="roundRect">
+            <a:avLst/>
+          </a:prstGeom>
+          <a:solidFill>
+            <a:srgbClr val="F5BF5B"/>
+          </a:solidFill>
+          <a:ln>
+            <a:noFill/>
+          </a:ln>
+        </p:spPr>
+        <p:style>
+          <a:lnRef idx="1">
+            <a:schemeClr val="accent1"/>
+          </a:lnRef>
+          <a:fillRef idx="3">
+            <a:schemeClr val="accent1"/>
+          </a:fillRef>
+          <a:effectRef idx="2">
+            <a:schemeClr val="accent1"/>
+          </a:effectRef>
+          <a:fontRef idx="minor">
+            <a:schemeClr val="lt1"/>
+          </a:fontRef>
+        </p:style>
+        <p:txBody>
+          <a:bodyPr rtlCol="0" anchor="ctr" wrap="none"/>
+          <a:lstStyle/>
+          <a:p>
+            <a:pPr algn="ctr"/>
+            <a:r>
+              <a:rPr sz="900" b="1">
+                <a:solidFill>
+                  <a:srgbClr val="F4F0EB"/>
+                </a:solidFill>
+                <a:latin typeface="Aptos"/>
+              </a:rPr>
+              <a:t>PIPELINE</a:t>
+            </a:r>
+          </a:p>
+        </p:txBody>
+      </p:sp>
+      <p:sp>
+        <p:nvSpPr>
+          <p:cNvPr id="30" name="TextBox 29"/>
+          <p:cNvSpPr txBox="1"/>
+          <p:nvPr/>
+        </p:nvSpPr>
+        <p:spPr>
+          <a:xfrm>
+            <a:off x="7251192" y="4553712"/>
+            <a:ext cx="4151376" cy="201168"/>
+          </a:xfrm>
+          <a:prstGeom prst="rect">
+            <a:avLst/>
+          </a:prstGeom>
+          <a:noFill/>
+        </p:spPr>
+        <p:txBody>
+          <a:bodyPr wrap="none">
+            <a:spAutoFit/>
+          </a:bodyPr>
+          <a:lstStyle/>
+          <a:p>
+            <a:r>
+              <a:rPr sz="1000" b="1">
+                <a:solidFill>
+                  <a:srgbClr val="F4F0EB"/>
+                </a:solidFill>
+                <a:latin typeface="Aptos"/>
+              </a:rPr>
+              <a:t>The run becomes an explicit tracked workflow.</a:t>
+            </a:r>
+          </a:p>
+        </p:txBody>
+      </p:sp>
+      <p:sp>
+        <p:nvSpPr>
+          <p:cNvPr id="31" name="Rounded Rectangle 30"/>
+          <p:cNvSpPr/>
+          <p:nvPr/>
+        </p:nvSpPr>
+        <p:spPr>
+          <a:xfrm>
+            <a:off x="7744968" y="4233672"/>
+            <a:ext cx="3840480" cy="1600200"/>
+          </a:xfrm>
+          <a:prstGeom prst="roundRect">
+            <a:avLst/>
+          </a:prstGeom>
+          <a:solidFill>
+            <a:srgbClr val="12202D"/>
+          </a:solidFill>
+          <a:ln>
+            <a:noFill/>
+          </a:ln>
+        </p:spPr>
+        <p:style>
+          <a:lnRef idx="1">
+            <a:schemeClr val="accent1"/>
+          </a:lnRef>
+          <a:fillRef idx="3">
+            <a:schemeClr val="accent1"/>
+          </a:fillRef>
+          <a:effectRef idx="2">
+            <a:schemeClr val="accent1"/>
+          </a:effectRef>
+          <a:fontRef idx="minor">
+            <a:schemeClr val="lt1"/>
+          </a:fontRef>
+        </p:style>
+        <p:txBody>
+          <a:bodyPr rtlCol="0" anchor="ctr"/>
+          <a:lstStyle/>
+          <a:p>
+            <a:pPr algn="ctr"/>
+          </a:p>
+        </p:txBody>
+      </p:sp>
+      <p:sp>
+        <p:nvSpPr>
+          <p:cNvPr id="32" name="Rounded Rectangle 31"/>
+          <p:cNvSpPr/>
+          <p:nvPr/>
+        </p:nvSpPr>
+        <p:spPr>
+          <a:xfrm>
+            <a:off x="7680960" y="4160520"/>
+            <a:ext cx="3840480" cy="1600200"/>
+          </a:xfrm>
+          <a:prstGeom prst="roundRect">
+            <a:avLst/>
+          </a:prstGeom>
+          <a:solidFill>
+            <a:srgbClr val="F7F3EE"/>
+          </a:solidFill>
+          <a:ln w="15240">
+            <a:solidFill>
+              <a:srgbClr val="D6CCC1"/>
+            </a:solidFill>
+          </a:ln>
+        </p:spPr>
+        <p:style>
+          <a:lnRef idx="1">
+            <a:schemeClr val="accent1"/>
+          </a:lnRef>
+          <a:fillRef idx="3">
+            <a:schemeClr val="accent1"/>
+          </a:fillRef>
+          <a:effectRef idx="2">
+            <a:schemeClr val="accent1"/>
+          </a:effectRef>
+          <a:fontRef idx="minor">
+            <a:schemeClr val="lt1"/>
+          </a:fontRef>
+        </p:style>
+        <p:txBody>
+          <a:bodyPr rtlCol="0" anchor="ctr"/>
+          <a:lstStyle/>
+          <a:p>
+            <a:pPr algn="ctr"/>
+          </a:p>
+        </p:txBody>
+      </p:sp>
+      <p:pic>
+        <p:nvPicPr>
+          <p:cNvPr id="33" name="Picture 32" descr="image.png"/>
+          <p:cNvPicPr>
+            <a:picLocks noChangeAspect="1"/>
+          </p:cNvPicPr>
+          <p:nvPr/>
+        </p:nvPicPr>
+        <p:blipFill>
+          <a:blip r:embed="rId4"/>
+          <a:stretch>
+            <a:fillRect/>
+          </a:stretch>
+        </p:blipFill>
+        <p:spPr>
+          <a:xfrm>
+            <a:off x="7790688" y="4270248"/>
+            <a:ext cx="3621024" cy="1380744"/>
+          </a:xfrm>
+          <a:prstGeom prst="rect">
+            <a:avLst/>
+          </a:prstGeom>
+        </p:spPr>
+      </p:pic>
+      <p:sp>
+        <p:nvSpPr>
+          <p:cNvPr id="34" name="Rounded Rectangle 33"/>
+          <p:cNvSpPr/>
+          <p:nvPr/>
+        </p:nvSpPr>
+        <p:spPr>
+          <a:xfrm>
+            <a:off x="7863840" y="4014216"/>
+            <a:ext cx="1097280" cy="310896"/>
+          </a:xfrm>
+          <a:prstGeom prst="roundRect">
+            <a:avLst/>
+          </a:prstGeom>
+          <a:solidFill>
+            <a:srgbClr val="54B9D6"/>
+          </a:solidFill>
+          <a:ln>
+            <a:noFill/>
+          </a:ln>
+        </p:spPr>
+        <p:style>
+          <a:lnRef idx="1">
+            <a:schemeClr val="accent1"/>
+          </a:lnRef>
+          <a:fillRef idx="3">
+            <a:schemeClr val="accent1"/>
+          </a:fillRef>
+          <a:effectRef idx="2">
+            <a:schemeClr val="accent1"/>
+          </a:effectRef>
+          <a:fontRef idx="minor">
+            <a:schemeClr val="lt1"/>
+          </a:fontRef>
+        </p:style>
+        <p:txBody>
+          <a:bodyPr rtlCol="0" anchor="ctr" wrap="none"/>
+          <a:lstStyle/>
+          <a:p>
+            <a:pPr algn="ctr"/>
+            <a:r>
+              <a:rPr sz="900" b="1">
+                <a:solidFill>
+                  <a:srgbClr val="F4F0EB"/>
+                </a:solidFill>
+                <a:latin typeface="Aptos"/>
+              </a:rPr>
+              <a:t>ANALYSIS</a:t>
+            </a:r>
+          </a:p>
+        </p:txBody>
+      </p:sp>
+      <p:sp>
+        <p:nvSpPr>
+          <p:cNvPr id="35" name="TextBox 34"/>
+          <p:cNvSpPr txBox="1"/>
+          <p:nvPr/>
+        </p:nvSpPr>
+        <p:spPr>
+          <a:xfrm>
+            <a:off x="7845552" y="5376672"/>
+            <a:ext cx="3511296" cy="201168"/>
+          </a:xfrm>
+          <a:prstGeom prst="rect">
+            <a:avLst/>
+          </a:prstGeom>
+          <a:noFill/>
+        </p:spPr>
+        <p:txBody>
+          <a:bodyPr wrap="none">
+            <a:spAutoFit/>
+          </a:bodyPr>
+          <a:lstStyle/>
+          <a:p>
+            <a:r>
+              <a:rPr sz="1000" b="1">
+                <a:solidFill>
+                  <a:srgbClr val="F4F0EB"/>
+                </a:solidFill>
+                <a:latin typeface="Aptos"/>
+              </a:rPr>
+              <a:t>Readable end-state evidence.</a:t>
             </a:r>
           </a:p>
         </p:txBody>
@@ -3274,7 +4598,7 @@
     <p:bg>
       <p:bgPr>
         <a:solidFill>
-          <a:srgbClr val="F7F3EB"/>
+          <a:srgbClr val="0B131D"/>
         </a:solidFill>
         <a:effectLst/>
       </p:bgPr>
@@ -3288,14 +4612,143 @@
       <p:grpSpPr/>
       <p:sp>
         <p:nvSpPr>
-          <p:cNvPr id="2" name="TextBox 1"/>
+          <p:cNvPr id="2" name="Rectangle 1"/>
+          <p:cNvSpPr/>
+          <p:nvPr/>
+        </p:nvSpPr>
+        <p:spPr>
+          <a:xfrm>
+            <a:off x="0" y="0"/>
+            <a:ext cx="12191695" cy="146304"/>
+          </a:xfrm>
+          <a:prstGeom prst="rect">
+            <a:avLst/>
+          </a:prstGeom>
+          <a:solidFill>
+            <a:srgbClr val="E86E3A"/>
+          </a:solidFill>
+          <a:ln>
+            <a:noFill/>
+          </a:ln>
+        </p:spPr>
+        <p:style>
+          <a:lnRef idx="1">
+            <a:schemeClr val="accent1"/>
+          </a:lnRef>
+          <a:fillRef idx="3">
+            <a:schemeClr val="accent1"/>
+          </a:fillRef>
+          <a:effectRef idx="2">
+            <a:schemeClr val="accent1"/>
+          </a:effectRef>
+          <a:fontRef idx="minor">
+            <a:schemeClr val="lt1"/>
+          </a:fontRef>
+        </p:style>
+        <p:txBody>
+          <a:bodyPr rtlCol="0" anchor="ctr"/>
+          <a:lstStyle/>
+          <a:p>
+            <a:pPr algn="ctr"/>
+          </a:p>
+        </p:txBody>
+      </p:sp>
+      <p:sp>
+        <p:nvSpPr>
+          <p:cNvPr id="3" name="Oval 2"/>
+          <p:cNvSpPr/>
+          <p:nvPr/>
+        </p:nvSpPr>
+        <p:spPr>
+          <a:xfrm>
+            <a:off x="10607040" y="-731520"/>
+            <a:ext cx="2560320" cy="2560320"/>
+          </a:xfrm>
+          <a:prstGeom prst="ellipse">
+            <a:avLst/>
+          </a:prstGeom>
+          <a:solidFill>
+            <a:srgbClr val="12202D"/>
+          </a:solidFill>
+          <a:ln>
+            <a:noFill/>
+          </a:ln>
+        </p:spPr>
+        <p:style>
+          <a:lnRef idx="1">
+            <a:schemeClr val="accent1"/>
+          </a:lnRef>
+          <a:fillRef idx="3">
+            <a:schemeClr val="accent1"/>
+          </a:fillRef>
+          <a:effectRef idx="2">
+            <a:schemeClr val="accent1"/>
+          </a:effectRef>
+          <a:fontRef idx="minor">
+            <a:schemeClr val="lt1"/>
+          </a:fontRef>
+        </p:style>
+        <p:txBody>
+          <a:bodyPr rtlCol="0" anchor="ctr"/>
+          <a:lstStyle/>
+          <a:p>
+            <a:pPr algn="ctr"/>
+          </a:p>
+        </p:txBody>
+      </p:sp>
+      <p:sp>
+        <p:nvSpPr>
+          <p:cNvPr id="4" name="Oval 3"/>
+          <p:cNvSpPr/>
+          <p:nvPr/>
+        </p:nvSpPr>
+        <p:spPr>
+          <a:xfrm>
+            <a:off x="9966960" y="5120640"/>
+            <a:ext cx="2103120" cy="2103120"/>
+          </a:xfrm>
+          <a:prstGeom prst="ellipse">
+            <a:avLst/>
+          </a:prstGeom>
+          <a:solidFill>
+            <a:srgbClr val="1C2D3D"/>
+          </a:solidFill>
+          <a:ln>
+            <a:noFill/>
+          </a:ln>
+        </p:spPr>
+        <p:style>
+          <a:lnRef idx="1">
+            <a:schemeClr val="accent1"/>
+          </a:lnRef>
+          <a:fillRef idx="3">
+            <a:schemeClr val="accent1"/>
+          </a:fillRef>
+          <a:effectRef idx="2">
+            <a:schemeClr val="accent1"/>
+          </a:effectRef>
+          <a:fontRef idx="minor">
+            <a:schemeClr val="lt1"/>
+          </a:fontRef>
+        </p:style>
+        <p:txBody>
+          <a:bodyPr rtlCol="0" anchor="ctr"/>
+          <a:lstStyle/>
+          <a:p>
+            <a:pPr algn="ctr"/>
+          </a:p>
+        </p:txBody>
+      </p:sp>
+      <p:sp>
+        <p:nvSpPr>
+          <p:cNvPr id="5" name="TextBox 4"/>
           <p:cNvSpPr txBox="1"/>
           <p:nvPr/>
         </p:nvSpPr>
         <p:spPr>
           <a:xfrm>
-            <a:off x="640080" y="502920"/>
-            <a:ext cx="10972800" cy="1005840"/>
+            <a:off x="777240" y="658368"/>
+            <a:ext cx="2926080" cy="228600"/>
           </a:xfrm>
           <a:prstGeom prst="rect">
             <a:avLst/>
@@ -3308,35 +4761,172 @@
           </a:bodyPr>
           <a:lstStyle/>
           <a:p>
-            <a:r>
-              <a:rPr sz="2800" b="1">
+            <a:pPr algn="l">
+              <a:spcBef>
+                <a:spcPts val="0"/>
+              </a:spcBef>
+              <a:spcAft>
+                <a:spcPts val="0"/>
+              </a:spcAft>
+            </a:pPr>
+            <a:r>
+              <a:rPr sz="1000" b="1">
                 <a:solidFill>
-                  <a:srgbClr val="2D5C7A"/>
+                  <a:srgbClr val="54B9D6"/>
                 </a:solidFill>
+                <a:latin typeface="Aptos"/>
+              </a:rPr>
+              <a:t>WORKFLOW CONTRACT</a:t>
+            </a:r>
+          </a:p>
+        </p:txBody>
+      </p:sp>
+      <p:sp>
+        <p:nvSpPr>
+          <p:cNvPr id="6" name="TextBox 5"/>
+          <p:cNvSpPr txBox="1"/>
+          <p:nvPr/>
+        </p:nvSpPr>
+        <p:spPr>
+          <a:xfrm>
+            <a:off x="777240" y="868680"/>
+            <a:ext cx="4846320" cy="1371600"/>
+          </a:xfrm>
+          <a:prstGeom prst="rect">
+            <a:avLst/>
+          </a:prstGeom>
+          <a:noFill/>
+        </p:spPr>
+        <p:txBody>
+          <a:bodyPr wrap="square" anchor="t">
+            <a:spAutoFit/>
+          </a:bodyPr>
+          <a:lstStyle/>
+          <a:p>
+            <a:pPr algn="l">
+              <a:spcAft>
+                <a:spcPts val="300"/>
+              </a:spcAft>
+            </a:pPr>
+            <a:r>
+              <a:rPr sz="2600" b="1">
+                <a:solidFill>
+                  <a:srgbClr val="F4F0EB"/>
+                </a:solidFill>
+                <a:latin typeface="Aptos Display"/>
               </a:rPr>
               <a:t>The Full Workflow Story</a:t>
             </a:r>
           </a:p>
           <a:p>
-            <a:pPr>
+            <a:pPr algn="l">
               <a:spcBef>
-                <a:spcPts val="400"/>
+                <a:spcPts val="200"/>
               </a:spcBef>
             </a:pPr>
             <a:r>
-              <a:rPr sz="1400">
+              <a:rPr sz="1300" b="0">
                 <a:solidFill>
-                  <a:srgbClr val="5B6268"/>
+                  <a:srgbClr val="ABB7C4"/>
                 </a:solidFill>
+                <a:latin typeface="Aptos"/>
               </a:rPr>
-              <a:t>This is the stronger README and public-tour narrative</a:t>
-            </a:r>
+              <a:t>This is the stronger README and public-tour narrative.</a:t>
+            </a:r>
+          </a:p>
+        </p:txBody>
+      </p:sp>
+      <p:sp>
+        <p:nvSpPr>
+          <p:cNvPr id="7" name="Rounded Rectangle 6"/>
+          <p:cNvSpPr/>
+          <p:nvPr/>
+        </p:nvSpPr>
+        <p:spPr>
+          <a:xfrm>
+            <a:off x="841248" y="1856232"/>
+            <a:ext cx="5897880" cy="3840480"/>
+          </a:xfrm>
+          <a:prstGeom prst="roundRect">
+            <a:avLst/>
+          </a:prstGeom>
+          <a:solidFill>
+            <a:srgbClr val="12202D"/>
+          </a:solidFill>
+          <a:ln>
+            <a:noFill/>
+          </a:ln>
+        </p:spPr>
+        <p:style>
+          <a:lnRef idx="1">
+            <a:schemeClr val="accent1"/>
+          </a:lnRef>
+          <a:fillRef idx="3">
+            <a:schemeClr val="accent1"/>
+          </a:fillRef>
+          <a:effectRef idx="2">
+            <a:schemeClr val="accent1"/>
+          </a:effectRef>
+          <a:fontRef idx="minor">
+            <a:schemeClr val="lt1"/>
+          </a:fontRef>
+        </p:style>
+        <p:txBody>
+          <a:bodyPr rtlCol="0" anchor="ctr"/>
+          <a:lstStyle/>
+          <a:p>
+            <a:pPr algn="ctr"/>
+          </a:p>
+        </p:txBody>
+      </p:sp>
+      <p:sp>
+        <p:nvSpPr>
+          <p:cNvPr id="8" name="Rounded Rectangle 7"/>
+          <p:cNvSpPr/>
+          <p:nvPr/>
+        </p:nvSpPr>
+        <p:spPr>
+          <a:xfrm>
+            <a:off x="777240" y="1783080"/>
+            <a:ext cx="5897880" cy="3840480"/>
+          </a:xfrm>
+          <a:prstGeom prst="roundRect">
+            <a:avLst/>
+          </a:prstGeom>
+          <a:solidFill>
+            <a:srgbClr val="F7F3EE"/>
+          </a:solidFill>
+          <a:ln w="15240">
+            <a:solidFill>
+              <a:srgbClr val="D6CCC1"/>
+            </a:solidFill>
+          </a:ln>
+        </p:spPr>
+        <p:style>
+          <a:lnRef idx="1">
+            <a:schemeClr val="accent1"/>
+          </a:lnRef>
+          <a:fillRef idx="3">
+            <a:schemeClr val="accent1"/>
+          </a:fillRef>
+          <a:effectRef idx="2">
+            <a:schemeClr val="accent1"/>
+          </a:effectRef>
+          <a:fontRef idx="minor">
+            <a:schemeClr val="lt1"/>
+          </a:fontRef>
+        </p:style>
+        <p:txBody>
+          <a:bodyPr rtlCol="0" anchor="ctr"/>
+          <a:lstStyle/>
+          <a:p>
+            <a:pPr algn="ctr"/>
           </a:p>
         </p:txBody>
       </p:sp>
       <p:pic>
         <p:nvPicPr>
-          <p:cNvPr id="3" name="Picture 2" descr="core-pages-overview.png"/>
+          <p:cNvPr id="9" name="Picture 8" descr="image.png"/>
           <p:cNvPicPr>
             <a:picLocks noChangeAspect="1"/>
           </p:cNvPicPr>
@@ -3350,8 +4940,8 @@
         </p:blipFill>
         <p:spPr>
           <a:xfrm>
-            <a:off x="640080" y="1371600"/>
-            <a:ext cx="5623560" cy="3383280"/>
+            <a:off x="886968" y="1892808"/>
+            <a:ext cx="5678424" cy="3621024"/>
           </a:xfrm>
           <a:prstGeom prst="rect">
             <a:avLst/>
@@ -3360,25 +4950,23 @@
       </p:pic>
       <p:sp>
         <p:nvSpPr>
-          <p:cNvPr id="4" name="Rounded Rectangle 3"/>
+          <p:cNvPr id="10" name="Rounded Rectangle 9"/>
           <p:cNvSpPr/>
           <p:nvPr/>
         </p:nvSpPr>
         <p:spPr>
           <a:xfrm>
-            <a:off x="6492240" y="1371600"/>
-            <a:ext cx="5029200" cy="3246120"/>
+            <a:off x="960120" y="1636776"/>
+            <a:ext cx="1389888" cy="310896"/>
           </a:xfrm>
           <a:prstGeom prst="roundRect">
             <a:avLst/>
           </a:prstGeom>
           <a:solidFill>
-            <a:srgbClr val="FFFBF5"/>
-          </a:solidFill>
-          <a:ln w="19050">
-            <a:solidFill>
-              <a:srgbClr val="DCCEBF"/>
-            </a:solidFill>
+            <a:srgbClr val="54B9D6"/>
+          </a:solidFill>
+          <a:ln>
+            <a:noFill/>
           </a:ln>
         </p:spPr>
         <p:style>
@@ -3396,23 +4984,32 @@
           </a:fontRef>
         </p:style>
         <p:txBody>
-          <a:bodyPr rtlCol="0" anchor="ctr"/>
+          <a:bodyPr rtlCol="0" anchor="ctr" wrap="none"/>
           <a:lstStyle/>
           <a:p>
             <a:pPr algn="ctr"/>
-          </a:p>
-        </p:txBody>
-      </p:sp>
-      <p:sp>
-        <p:nvSpPr>
-          <p:cNvPr id="5" name="TextBox 4"/>
+            <a:r>
+              <a:rPr sz="900" b="1">
+                <a:solidFill>
+                  <a:srgbClr val="F4F0EB"/>
+                </a:solidFill>
+                <a:latin typeface="Aptos"/>
+              </a:rPr>
+              <a:t>FOUR PAGE FLOW</a:t>
+            </a:r>
+          </a:p>
+        </p:txBody>
+      </p:sp>
+      <p:sp>
+        <p:nvSpPr>
+          <p:cNvPr id="11" name="TextBox 10"/>
           <p:cNvSpPr txBox="1"/>
           <p:nvPr/>
         </p:nvSpPr>
         <p:spPr>
           <a:xfrm>
-            <a:off x="6766560" y="1737360"/>
-            <a:ext cx="4480560" cy="2560320"/>
+            <a:off x="941832" y="5239512"/>
+            <a:ext cx="5568696" cy="201168"/>
           </a:xfrm>
           <a:prstGeom prst="rect">
             <a:avLst/>
@@ -3420,78 +5017,42 @@
           <a:noFill/>
         </p:spPr>
         <p:txBody>
-          <a:bodyPr wrap="square">
+          <a:bodyPr wrap="none">
             <a:spAutoFit/>
           </a:bodyPr>
           <a:lstStyle/>
           <a:p>
-            <a:pPr>
-              <a:spcAft>
-                <a:spcPts val="800"/>
-              </a:spcAft>
-              <a:defRPr sz="1800">
+            <a:r>
+              <a:rPr sz="1000" b="1">
                 <a:solidFill>
-                  <a:srgbClr val="212427"/>
+                  <a:srgbClr val="F4F0EB"/>
                 </a:solidFill>
-              </a:defRPr>
-            </a:pPr>
-            <a:r>
-              <a:t>Use the four core pages in order, not as isolated screens.</a:t>
-            </a:r>
-          </a:p>
-          <a:p>
-            <a:pPr>
-              <a:spcAft>
-                <a:spcPts val="800"/>
-              </a:spcAft>
-              <a:defRPr sz="1800">
-                <a:solidFill>
-                  <a:srgbClr val="212427"/>
-                </a:solidFill>
-              </a:defRPr>
-            </a:pPr>
-            <a:r>
-              <a:t>Make the run replayable through PIPELINE, not only executable once.</a:t>
-            </a:r>
-          </a:p>
-          <a:p>
-            <a:pPr>
-              <a:spcAft>
-                <a:spcPts val="800"/>
-              </a:spcAft>
-              <a:defRPr sz="1800">
-                <a:solidFill>
-                  <a:srgbClr val="212427"/>
-                </a:solidFill>
-              </a:defRPr>
-            </a:pPr>
-            <a:r>
-              <a:t>End on ANALYSIS evidence that a technical audience can interpret quickly.</a:t>
-            </a:r>
-          </a:p>
-        </p:txBody>
-      </p:sp>
-      <p:sp>
-        <p:nvSpPr>
-          <p:cNvPr id="6" name="Rounded Rectangle 5"/>
+                <a:latin typeface="Aptos"/>
+              </a:rPr>
+              <a:t>The story is the page sequence, not isolated screenshots.</a:t>
+            </a:r>
+          </a:p>
+        </p:txBody>
+      </p:sp>
+      <p:sp>
+        <p:nvSpPr>
+          <p:cNvPr id="12" name="Rounded Rectangle 11"/>
           <p:cNvSpPr/>
           <p:nvPr/>
         </p:nvSpPr>
         <p:spPr>
           <a:xfrm>
-            <a:off x="640080" y="4800600"/>
-            <a:ext cx="10881360" cy="914400"/>
+            <a:off x="7059168" y="1901952"/>
+            <a:ext cx="4114800" cy="1005840"/>
           </a:xfrm>
           <a:prstGeom prst="roundRect">
             <a:avLst/>
           </a:prstGeom>
           <a:solidFill>
-            <a:srgbClr val="FFFBF5"/>
-          </a:solidFill>
-          <a:ln w="19050">
-            <a:solidFill>
-              <a:srgbClr val="DCCEBF"/>
-            </a:solidFill>
+            <a:srgbClr val="12202D"/>
+          </a:solidFill>
+          <a:ln>
+            <a:noFill/>
           </a:ln>
         </p:spPr>
         <p:style>
@@ -3518,14 +5079,102 @@
       </p:sp>
       <p:sp>
         <p:nvSpPr>
-          <p:cNvPr id="7" name="TextBox 6"/>
+          <p:cNvPr id="13" name="Rounded Rectangle 12"/>
+          <p:cNvSpPr/>
+          <p:nvPr/>
+        </p:nvSpPr>
+        <p:spPr>
+          <a:xfrm>
+            <a:off x="6995160" y="1828800"/>
+            <a:ext cx="4114800" cy="1005840"/>
+          </a:xfrm>
+          <a:prstGeom prst="roundRect">
+            <a:avLst/>
+          </a:prstGeom>
+          <a:solidFill>
+            <a:srgbClr val="F7F3EE"/>
+          </a:solidFill>
+          <a:ln w="15240">
+            <a:solidFill>
+              <a:srgbClr val="D6CCC1"/>
+            </a:solidFill>
+          </a:ln>
+        </p:spPr>
+        <p:style>
+          <a:lnRef idx="1">
+            <a:schemeClr val="accent1"/>
+          </a:lnRef>
+          <a:fillRef idx="3">
+            <a:schemeClr val="accent1"/>
+          </a:fillRef>
+          <a:effectRef idx="2">
+            <a:schemeClr val="accent1"/>
+          </a:effectRef>
+          <a:fontRef idx="minor">
+            <a:schemeClr val="lt1"/>
+          </a:fontRef>
+        </p:style>
+        <p:txBody>
+          <a:bodyPr rtlCol="0" anchor="ctr"/>
+          <a:lstStyle/>
+          <a:p>
+            <a:pPr algn="ctr"/>
+          </a:p>
+        </p:txBody>
+      </p:sp>
+      <p:sp>
+        <p:nvSpPr>
+          <p:cNvPr id="14" name="Rectangle 13"/>
+          <p:cNvSpPr/>
+          <p:nvPr/>
+        </p:nvSpPr>
+        <p:spPr>
+          <a:xfrm>
+            <a:off x="6995160" y="1828800"/>
+            <a:ext cx="118872" cy="1005840"/>
+          </a:xfrm>
+          <a:prstGeom prst="rect">
+            <a:avLst/>
+          </a:prstGeom>
+          <a:solidFill>
+            <a:srgbClr val="E86E3A"/>
+          </a:solidFill>
+          <a:ln>
+            <a:noFill/>
+          </a:ln>
+        </p:spPr>
+        <p:style>
+          <a:lnRef idx="1">
+            <a:schemeClr val="accent1"/>
+          </a:lnRef>
+          <a:fillRef idx="3">
+            <a:schemeClr val="accent1"/>
+          </a:fillRef>
+          <a:effectRef idx="2">
+            <a:schemeClr val="accent1"/>
+          </a:effectRef>
+          <a:fontRef idx="minor">
+            <a:schemeClr val="lt1"/>
+          </a:fontRef>
+        </p:style>
+        <p:txBody>
+          <a:bodyPr rtlCol="0" anchor="ctr"/>
+          <a:lstStyle/>
+          <a:p>
+            <a:pPr algn="ctr"/>
+          </a:p>
+        </p:txBody>
+      </p:sp>
+      <p:sp>
+        <p:nvSpPr>
+          <p:cNvPr id="15" name="TextBox 14"/>
           <p:cNvSpPr txBox="1"/>
           <p:nvPr/>
         </p:nvSpPr>
         <p:spPr>
           <a:xfrm>
-            <a:off x="914400" y="5010912"/>
-            <a:ext cx="10332720" cy="502920"/>
+            <a:off x="7251192" y="2011680"/>
+            <a:ext cx="3657600" cy="731520"/>
           </a:xfrm>
           <a:prstGeom prst="rect">
             <a:avLst/>
@@ -3540,16 +5189,467 @@
           <a:p>
             <a:pPr>
               <a:spcAft>
-                <a:spcPts val="800"/>
+                <a:spcPts val="200"/>
               </a:spcAft>
-              <a:defRPr sz="1800">
+            </a:pPr>
+            <a:r>
+              <a:rPr sz="1400" b="1">
                 <a:solidFill>
-                  <a:srgbClr val="212427"/>
+                  <a:srgbClr val="19212A"/>
                 </a:solidFill>
-              </a:defRPr>
+                <a:latin typeface="Aptos Display"/>
+              </a:rPr>
+              <a:t>Explicit context</a:t>
+            </a:r>
+          </a:p>
+          <a:p>
+            <a:r>
+              <a:rPr sz="1100" b="0">
+                <a:solidFill>
+                  <a:srgbClr val="57606D"/>
+                </a:solidFill>
+                <a:latin typeface="Aptos"/>
+              </a:rPr>
+              <a:t>PROJECT anchors the app and scenario instead of hiding setup inside an implicit shell state.</a:t>
+            </a:r>
+          </a:p>
+        </p:txBody>
+      </p:sp>
+      <p:sp>
+        <p:nvSpPr>
+          <p:cNvPr id="16" name="Rounded Rectangle 15"/>
+          <p:cNvSpPr/>
+          <p:nvPr/>
+        </p:nvSpPr>
+        <p:spPr>
+          <a:xfrm>
+            <a:off x="7059168" y="3072384"/>
+            <a:ext cx="4114800" cy="1005840"/>
+          </a:xfrm>
+          <a:prstGeom prst="roundRect">
+            <a:avLst/>
+          </a:prstGeom>
+          <a:solidFill>
+            <a:srgbClr val="12202D"/>
+          </a:solidFill>
+          <a:ln>
+            <a:noFill/>
+          </a:ln>
+        </p:spPr>
+        <p:style>
+          <a:lnRef idx="1">
+            <a:schemeClr val="accent1"/>
+          </a:lnRef>
+          <a:fillRef idx="3">
+            <a:schemeClr val="accent1"/>
+          </a:fillRef>
+          <a:effectRef idx="2">
+            <a:schemeClr val="accent1"/>
+          </a:effectRef>
+          <a:fontRef idx="minor">
+            <a:schemeClr val="lt1"/>
+          </a:fontRef>
+        </p:style>
+        <p:txBody>
+          <a:bodyPr rtlCol="0" anchor="ctr"/>
+          <a:lstStyle/>
+          <a:p>
+            <a:pPr algn="ctr"/>
+          </a:p>
+        </p:txBody>
+      </p:sp>
+      <p:sp>
+        <p:nvSpPr>
+          <p:cNvPr id="17" name="Rounded Rectangle 16"/>
+          <p:cNvSpPr/>
+          <p:nvPr/>
+        </p:nvSpPr>
+        <p:spPr>
+          <a:xfrm>
+            <a:off x="6995160" y="2999232"/>
+            <a:ext cx="4114800" cy="1005840"/>
+          </a:xfrm>
+          <a:prstGeom prst="roundRect">
+            <a:avLst/>
+          </a:prstGeom>
+          <a:solidFill>
+            <a:srgbClr val="F7F3EE"/>
+          </a:solidFill>
+          <a:ln w="15240">
+            <a:solidFill>
+              <a:srgbClr val="D6CCC1"/>
+            </a:solidFill>
+          </a:ln>
+        </p:spPr>
+        <p:style>
+          <a:lnRef idx="1">
+            <a:schemeClr val="accent1"/>
+          </a:lnRef>
+          <a:fillRef idx="3">
+            <a:schemeClr val="accent1"/>
+          </a:fillRef>
+          <a:effectRef idx="2">
+            <a:schemeClr val="accent1"/>
+          </a:effectRef>
+          <a:fontRef idx="minor">
+            <a:schemeClr val="lt1"/>
+          </a:fontRef>
+        </p:style>
+        <p:txBody>
+          <a:bodyPr rtlCol="0" anchor="ctr"/>
+          <a:lstStyle/>
+          <a:p>
+            <a:pPr algn="ctr"/>
+          </a:p>
+        </p:txBody>
+      </p:sp>
+      <p:sp>
+        <p:nvSpPr>
+          <p:cNvPr id="18" name="Rectangle 17"/>
+          <p:cNvSpPr/>
+          <p:nvPr/>
+        </p:nvSpPr>
+        <p:spPr>
+          <a:xfrm>
+            <a:off x="6995160" y="2999232"/>
+            <a:ext cx="118872" cy="1005840"/>
+          </a:xfrm>
+          <a:prstGeom prst="rect">
+            <a:avLst/>
+          </a:prstGeom>
+          <a:solidFill>
+            <a:srgbClr val="F5BF5B"/>
+          </a:solidFill>
+          <a:ln>
+            <a:noFill/>
+          </a:ln>
+        </p:spPr>
+        <p:style>
+          <a:lnRef idx="1">
+            <a:schemeClr val="accent1"/>
+          </a:lnRef>
+          <a:fillRef idx="3">
+            <a:schemeClr val="accent1"/>
+          </a:fillRef>
+          <a:effectRef idx="2">
+            <a:schemeClr val="accent1"/>
+          </a:effectRef>
+          <a:fontRef idx="minor">
+            <a:schemeClr val="lt1"/>
+          </a:fontRef>
+        </p:style>
+        <p:txBody>
+          <a:bodyPr rtlCol="0" anchor="ctr"/>
+          <a:lstStyle/>
+          <a:p>
+            <a:pPr algn="ctr"/>
+          </a:p>
+        </p:txBody>
+      </p:sp>
+      <p:sp>
+        <p:nvSpPr>
+          <p:cNvPr id="19" name="TextBox 18"/>
+          <p:cNvSpPr txBox="1"/>
+          <p:nvPr/>
+        </p:nvSpPr>
+        <p:spPr>
+          <a:xfrm>
+            <a:off x="7251192" y="3182112"/>
+            <a:ext cx="3657600" cy="731520"/>
+          </a:xfrm>
+          <a:prstGeom prst="rect">
+            <a:avLst/>
+          </a:prstGeom>
+          <a:noFill/>
+        </p:spPr>
+        <p:txBody>
+          <a:bodyPr wrap="square">
+            <a:spAutoFit/>
+          </a:bodyPr>
+          <a:lstStyle/>
+          <a:p>
+            <a:pPr>
+              <a:spcAft>
+                <a:spcPts val="200"/>
+              </a:spcAft>
             </a:pPr>
             <a:r>
-              <a:t>Narration: AGILAB turns a lightweight experiment into a controlled, replayable workflow instead of a one-off script path.</a:t>
+              <a:rPr sz="1400" b="1">
+                <a:solidFill>
+                  <a:srgbClr val="19212A"/>
+                </a:solidFill>
+                <a:latin typeface="Aptos Display"/>
+              </a:rPr>
+              <a:t>Replayable workflow</a:t>
+            </a:r>
+          </a:p>
+          <a:p>
+            <a:r>
+              <a:rPr sz="1100" b="0">
+                <a:solidFill>
+                  <a:srgbClr val="57606D"/>
+                </a:solidFill>
+                <a:latin typeface="Aptos"/>
+              </a:rPr>
+              <a:t>PIPELINE shows that execution steps and artifacts can be inspected and rerun, not only re-described.</a:t>
+            </a:r>
+          </a:p>
+        </p:txBody>
+      </p:sp>
+      <p:sp>
+        <p:nvSpPr>
+          <p:cNvPr id="20" name="Rounded Rectangle 19"/>
+          <p:cNvSpPr/>
+          <p:nvPr/>
+        </p:nvSpPr>
+        <p:spPr>
+          <a:xfrm>
+            <a:off x="7059168" y="4242815"/>
+            <a:ext cx="4114800" cy="1005840"/>
+          </a:xfrm>
+          <a:prstGeom prst="roundRect">
+            <a:avLst/>
+          </a:prstGeom>
+          <a:solidFill>
+            <a:srgbClr val="12202D"/>
+          </a:solidFill>
+          <a:ln>
+            <a:noFill/>
+          </a:ln>
+        </p:spPr>
+        <p:style>
+          <a:lnRef idx="1">
+            <a:schemeClr val="accent1"/>
+          </a:lnRef>
+          <a:fillRef idx="3">
+            <a:schemeClr val="accent1"/>
+          </a:fillRef>
+          <a:effectRef idx="2">
+            <a:schemeClr val="accent1"/>
+          </a:effectRef>
+          <a:fontRef idx="minor">
+            <a:schemeClr val="lt1"/>
+          </a:fontRef>
+        </p:style>
+        <p:txBody>
+          <a:bodyPr rtlCol="0" anchor="ctr"/>
+          <a:lstStyle/>
+          <a:p>
+            <a:pPr algn="ctr"/>
+          </a:p>
+        </p:txBody>
+      </p:sp>
+      <p:sp>
+        <p:nvSpPr>
+          <p:cNvPr id="21" name="Rounded Rectangle 20"/>
+          <p:cNvSpPr/>
+          <p:nvPr/>
+        </p:nvSpPr>
+        <p:spPr>
+          <a:xfrm>
+            <a:off x="6995160" y="4169663"/>
+            <a:ext cx="4114800" cy="1005840"/>
+          </a:xfrm>
+          <a:prstGeom prst="roundRect">
+            <a:avLst/>
+          </a:prstGeom>
+          <a:solidFill>
+            <a:srgbClr val="F7F3EE"/>
+          </a:solidFill>
+          <a:ln w="15240">
+            <a:solidFill>
+              <a:srgbClr val="D6CCC1"/>
+            </a:solidFill>
+          </a:ln>
+        </p:spPr>
+        <p:style>
+          <a:lnRef idx="1">
+            <a:schemeClr val="accent1"/>
+          </a:lnRef>
+          <a:fillRef idx="3">
+            <a:schemeClr val="accent1"/>
+          </a:fillRef>
+          <a:effectRef idx="2">
+            <a:schemeClr val="accent1"/>
+          </a:effectRef>
+          <a:fontRef idx="minor">
+            <a:schemeClr val="lt1"/>
+          </a:fontRef>
+        </p:style>
+        <p:txBody>
+          <a:bodyPr rtlCol="0" anchor="ctr"/>
+          <a:lstStyle/>
+          <a:p>
+            <a:pPr algn="ctr"/>
+          </a:p>
+        </p:txBody>
+      </p:sp>
+      <p:sp>
+        <p:nvSpPr>
+          <p:cNvPr id="22" name="Rectangle 21"/>
+          <p:cNvSpPr/>
+          <p:nvPr/>
+        </p:nvSpPr>
+        <p:spPr>
+          <a:xfrm>
+            <a:off x="6995160" y="4169663"/>
+            <a:ext cx="118872" cy="1005840"/>
+          </a:xfrm>
+          <a:prstGeom prst="rect">
+            <a:avLst/>
+          </a:prstGeom>
+          <a:solidFill>
+            <a:srgbClr val="54B9D6"/>
+          </a:solidFill>
+          <a:ln>
+            <a:noFill/>
+          </a:ln>
+        </p:spPr>
+        <p:style>
+          <a:lnRef idx="1">
+            <a:schemeClr val="accent1"/>
+          </a:lnRef>
+          <a:fillRef idx="3">
+            <a:schemeClr val="accent1"/>
+          </a:fillRef>
+          <a:effectRef idx="2">
+            <a:schemeClr val="accent1"/>
+          </a:effectRef>
+          <a:fontRef idx="minor">
+            <a:schemeClr val="lt1"/>
+          </a:fontRef>
+        </p:style>
+        <p:txBody>
+          <a:bodyPr rtlCol="0" anchor="ctr"/>
+          <a:lstStyle/>
+          <a:p>
+            <a:pPr algn="ctr"/>
+          </a:p>
+        </p:txBody>
+      </p:sp>
+      <p:sp>
+        <p:nvSpPr>
+          <p:cNvPr id="23" name="TextBox 22"/>
+          <p:cNvSpPr txBox="1"/>
+          <p:nvPr/>
+        </p:nvSpPr>
+        <p:spPr>
+          <a:xfrm>
+            <a:off x="7251192" y="4352543"/>
+            <a:ext cx="3657600" cy="731520"/>
+          </a:xfrm>
+          <a:prstGeom prst="rect">
+            <a:avLst/>
+          </a:prstGeom>
+          <a:noFill/>
+        </p:spPr>
+        <p:txBody>
+          <a:bodyPr wrap="square">
+            <a:spAutoFit/>
+          </a:bodyPr>
+          <a:lstStyle/>
+          <a:p>
+            <a:pPr>
+              <a:spcAft>
+                <a:spcPts val="200"/>
+              </a:spcAft>
+            </a:pPr>
+            <a:r>
+              <a:rPr sz="1400" b="1">
+                <a:solidFill>
+                  <a:srgbClr val="19212A"/>
+                </a:solidFill>
+                <a:latin typeface="Aptos Display"/>
+              </a:rPr>
+              <a:t>Technical payoff</a:t>
+            </a:r>
+          </a:p>
+          <a:p>
+            <a:r>
+              <a:rPr sz="1100" b="0">
+                <a:solidFill>
+                  <a:srgbClr val="57606D"/>
+                </a:solidFill>
+                <a:latin typeface="Aptos"/>
+              </a:rPr>
+              <a:t>ANALYSIS lands on queue or route evidence that justifies the workflow story.</a:t>
+            </a:r>
+          </a:p>
+        </p:txBody>
+      </p:sp>
+      <p:sp>
+        <p:nvSpPr>
+          <p:cNvPr id="24" name="Rounded Rectangle 23"/>
+          <p:cNvSpPr/>
+          <p:nvPr/>
+        </p:nvSpPr>
+        <p:spPr>
+          <a:xfrm>
+            <a:off x="777240" y="5742432"/>
+            <a:ext cx="10332720" cy="786384"/>
+          </a:xfrm>
+          <a:prstGeom prst="roundRect">
+            <a:avLst/>
+          </a:prstGeom>
+          <a:solidFill>
+            <a:srgbClr val="1C2D3D"/>
+          </a:solidFill>
+          <a:ln w="15240">
+            <a:noFill/>
+          </a:ln>
+        </p:spPr>
+        <p:style>
+          <a:lnRef idx="1">
+            <a:schemeClr val="accent1"/>
+          </a:lnRef>
+          <a:fillRef idx="3">
+            <a:schemeClr val="accent1"/>
+          </a:fillRef>
+          <a:effectRef idx="2">
+            <a:schemeClr val="accent1"/>
+          </a:effectRef>
+          <a:fontRef idx="minor">
+            <a:schemeClr val="lt1"/>
+          </a:fontRef>
+        </p:style>
+        <p:txBody>
+          <a:bodyPr rtlCol="0" anchor="ctr"/>
+          <a:lstStyle/>
+          <a:p>
+            <a:pPr algn="ctr"/>
+          </a:p>
+        </p:txBody>
+      </p:sp>
+      <p:sp>
+        <p:nvSpPr>
+          <p:cNvPr id="25" name="TextBox 24"/>
+          <p:cNvSpPr txBox="1"/>
+          <p:nvPr/>
+        </p:nvSpPr>
+        <p:spPr>
+          <a:xfrm>
+            <a:off x="996696" y="5907024"/>
+            <a:ext cx="9893808" cy="566928"/>
+          </a:xfrm>
+          <a:prstGeom prst="rect">
+            <a:avLst/>
+          </a:prstGeom>
+          <a:noFill/>
+        </p:spPr>
+        <p:txBody>
+          <a:bodyPr wrap="square">
+            <a:spAutoFit/>
+          </a:bodyPr>
+          <a:lstStyle/>
+          <a:p>
+            <a:r>
+              <a:rPr sz="1200" b="0">
+                <a:solidFill>
+                  <a:srgbClr val="F4F0EB"/>
+                </a:solidFill>
+                <a:latin typeface="Aptos"/>
+              </a:rPr>
+              <a:t>Narration: AGILAB turns a lightweight experiment into an explicit, reviewable workflow instead of a one-off script path.</a:t>
             </a:r>
           </a:p>
         </p:txBody>
@@ -3568,7 +5668,7 @@
     <p:bg>
       <p:bgPr>
         <a:solidFill>
-          <a:srgbClr val="F7F3EB"/>
+          <a:srgbClr val="0B131D"/>
         </a:solidFill>
         <a:effectLst/>
       </p:bgPr>
@@ -3582,14 +5682,143 @@
       <p:grpSpPr/>
       <p:sp>
         <p:nvSpPr>
-          <p:cNvPr id="2" name="TextBox 1"/>
+          <p:cNvPr id="2" name="Rectangle 1"/>
+          <p:cNvSpPr/>
+          <p:nvPr/>
+        </p:nvSpPr>
+        <p:spPr>
+          <a:xfrm>
+            <a:off x="0" y="0"/>
+            <a:ext cx="12191695" cy="146304"/>
+          </a:xfrm>
+          <a:prstGeom prst="rect">
+            <a:avLst/>
+          </a:prstGeom>
+          <a:solidFill>
+            <a:srgbClr val="E86E3A"/>
+          </a:solidFill>
+          <a:ln>
+            <a:noFill/>
+          </a:ln>
+        </p:spPr>
+        <p:style>
+          <a:lnRef idx="1">
+            <a:schemeClr val="accent1"/>
+          </a:lnRef>
+          <a:fillRef idx="3">
+            <a:schemeClr val="accent1"/>
+          </a:fillRef>
+          <a:effectRef idx="2">
+            <a:schemeClr val="accent1"/>
+          </a:effectRef>
+          <a:fontRef idx="minor">
+            <a:schemeClr val="lt1"/>
+          </a:fontRef>
+        </p:style>
+        <p:txBody>
+          <a:bodyPr rtlCol="0" anchor="ctr"/>
+          <a:lstStyle/>
+          <a:p>
+            <a:pPr algn="ctr"/>
+          </a:p>
+        </p:txBody>
+      </p:sp>
+      <p:sp>
+        <p:nvSpPr>
+          <p:cNvPr id="3" name="Oval 2"/>
+          <p:cNvSpPr/>
+          <p:nvPr/>
+        </p:nvSpPr>
+        <p:spPr>
+          <a:xfrm>
+            <a:off x="10607040" y="-731520"/>
+            <a:ext cx="2560320" cy="2560320"/>
+          </a:xfrm>
+          <a:prstGeom prst="ellipse">
+            <a:avLst/>
+          </a:prstGeom>
+          <a:solidFill>
+            <a:srgbClr val="12202D"/>
+          </a:solidFill>
+          <a:ln>
+            <a:noFill/>
+          </a:ln>
+        </p:spPr>
+        <p:style>
+          <a:lnRef idx="1">
+            <a:schemeClr val="accent1"/>
+          </a:lnRef>
+          <a:fillRef idx="3">
+            <a:schemeClr val="accent1"/>
+          </a:fillRef>
+          <a:effectRef idx="2">
+            <a:schemeClr val="accent1"/>
+          </a:effectRef>
+          <a:fontRef idx="minor">
+            <a:schemeClr val="lt1"/>
+          </a:fontRef>
+        </p:style>
+        <p:txBody>
+          <a:bodyPr rtlCol="0" anchor="ctr"/>
+          <a:lstStyle/>
+          <a:p>
+            <a:pPr algn="ctr"/>
+          </a:p>
+        </p:txBody>
+      </p:sp>
+      <p:sp>
+        <p:nvSpPr>
+          <p:cNvPr id="4" name="Oval 3"/>
+          <p:cNvSpPr/>
+          <p:nvPr/>
+        </p:nvSpPr>
+        <p:spPr>
+          <a:xfrm>
+            <a:off x="9966960" y="5120640"/>
+            <a:ext cx="2103120" cy="2103120"/>
+          </a:xfrm>
+          <a:prstGeom prst="ellipse">
+            <a:avLst/>
+          </a:prstGeom>
+          <a:solidFill>
+            <a:srgbClr val="1C2D3D"/>
+          </a:solidFill>
+          <a:ln>
+            <a:noFill/>
+          </a:ln>
+        </p:spPr>
+        <p:style>
+          <a:lnRef idx="1">
+            <a:schemeClr val="accent1"/>
+          </a:lnRef>
+          <a:fillRef idx="3">
+            <a:schemeClr val="accent1"/>
+          </a:fillRef>
+          <a:effectRef idx="2">
+            <a:schemeClr val="accent1"/>
+          </a:effectRef>
+          <a:fontRef idx="minor">
+            <a:schemeClr val="lt1"/>
+          </a:fontRef>
+        </p:style>
+        <p:txBody>
+          <a:bodyPr rtlCol="0" anchor="ctr"/>
+          <a:lstStyle/>
+          <a:p>
+            <a:pPr algn="ctr"/>
+          </a:p>
+        </p:txBody>
+      </p:sp>
+      <p:sp>
+        <p:nvSpPr>
+          <p:cNvPr id="5" name="TextBox 4"/>
           <p:cNvSpPr txBox="1"/>
           <p:nvPr/>
         </p:nvSpPr>
         <p:spPr>
           <a:xfrm>
-            <a:off x="640080" y="502920"/>
-            <a:ext cx="10972800" cy="1005840"/>
+            <a:off x="777240" y="658368"/>
+            <a:ext cx="2560320" cy="228600"/>
           </a:xfrm>
           <a:prstGeom prst="rect">
             <a:avLst/>
@@ -3602,35 +5831,172 @@
           </a:bodyPr>
           <a:lstStyle/>
           <a:p>
-            <a:r>
-              <a:rPr sz="2800" b="1">
+            <a:pPr algn="l">
+              <a:spcBef>
+                <a:spcPts val="0"/>
+              </a:spcBef>
+              <a:spcAft>
+                <a:spcPts val="0"/>
+              </a:spcAft>
+            </a:pPr>
+            <a:r>
+              <a:rPr sz="1000" b="1">
                 <a:solidFill>
-                  <a:srgbClr val="2D5C7A"/>
+                  <a:srgbClr val="54B9D6"/>
                 </a:solidFill>
+                <a:latin typeface="Aptos"/>
+              </a:rPr>
+              <a:t>PAGE SEQUENCE</a:t>
+            </a:r>
+          </a:p>
+        </p:txBody>
+      </p:sp>
+      <p:sp>
+        <p:nvSpPr>
+          <p:cNvPr id="6" name="TextBox 5"/>
+          <p:cNvSpPr txBox="1"/>
+          <p:nvPr/>
+        </p:nvSpPr>
+        <p:spPr>
+          <a:xfrm>
+            <a:off x="777240" y="868680"/>
+            <a:ext cx="6492240" cy="1371600"/>
+          </a:xfrm>
+          <a:prstGeom prst="rect">
+            <a:avLst/>
+          </a:prstGeom>
+          <a:noFill/>
+        </p:spPr>
+        <p:txBody>
+          <a:bodyPr wrap="square" anchor="t">
+            <a:spAutoFit/>
+          </a:bodyPr>
+          <a:lstStyle/>
+          <a:p>
+            <a:pPr algn="l">
+              <a:spcAft>
+                <a:spcPts val="300"/>
+              </a:spcAft>
+            </a:pPr>
+            <a:r>
+              <a:rPr sz="2600" b="1">
+                <a:solidFill>
+                  <a:srgbClr val="F4F0EB"/>
+                </a:solidFill>
+                <a:latin typeface="Aptos Display"/>
               </a:rPr>
               <a:t>Project To Pipeline</a:t>
             </a:r>
           </a:p>
           <a:p>
-            <a:pPr>
+            <a:pPr algn="l">
               <a:spcBef>
-                <a:spcPts val="400"/>
+                <a:spcPts val="200"/>
               </a:spcBef>
             </a:pPr>
             <a:r>
-              <a:rPr sz="1400">
+              <a:rPr sz="1300" b="0">
                 <a:solidFill>
-                  <a:srgbClr val="5B6268"/>
+                  <a:srgbClr val="ABB7C4"/>
                 </a:solidFill>
+                <a:latin typeface="Aptos"/>
               </a:rPr>
-              <a:t>PROJECT and ORCHESTRATE establish the run; PIPELINE makes it explicit</a:t>
-            </a:r>
+              <a:t>PROJECT and ORCHESTRATE establish the run; PIPELINE makes it explicit.</a:t>
+            </a:r>
+          </a:p>
+        </p:txBody>
+      </p:sp>
+      <p:sp>
+        <p:nvSpPr>
+          <p:cNvPr id="7" name="Rounded Rectangle 6"/>
+          <p:cNvSpPr/>
+          <p:nvPr/>
+        </p:nvSpPr>
+        <p:spPr>
+          <a:xfrm>
+            <a:off x="841248" y="1947671"/>
+            <a:ext cx="3474720" cy="2743200"/>
+          </a:xfrm>
+          <a:prstGeom prst="roundRect">
+            <a:avLst/>
+          </a:prstGeom>
+          <a:solidFill>
+            <a:srgbClr val="12202D"/>
+          </a:solidFill>
+          <a:ln>
+            <a:noFill/>
+          </a:ln>
+        </p:spPr>
+        <p:style>
+          <a:lnRef idx="1">
+            <a:schemeClr val="accent1"/>
+          </a:lnRef>
+          <a:fillRef idx="3">
+            <a:schemeClr val="accent1"/>
+          </a:fillRef>
+          <a:effectRef idx="2">
+            <a:schemeClr val="accent1"/>
+          </a:effectRef>
+          <a:fontRef idx="minor">
+            <a:schemeClr val="lt1"/>
+          </a:fontRef>
+        </p:style>
+        <p:txBody>
+          <a:bodyPr rtlCol="0" anchor="ctr"/>
+          <a:lstStyle/>
+          <a:p>
+            <a:pPr algn="ctr"/>
+          </a:p>
+        </p:txBody>
+      </p:sp>
+      <p:sp>
+        <p:nvSpPr>
+          <p:cNvPr id="8" name="Rounded Rectangle 7"/>
+          <p:cNvSpPr/>
+          <p:nvPr/>
+        </p:nvSpPr>
+        <p:spPr>
+          <a:xfrm>
+            <a:off x="777240" y="1874519"/>
+            <a:ext cx="3474720" cy="2743200"/>
+          </a:xfrm>
+          <a:prstGeom prst="roundRect">
+            <a:avLst/>
+          </a:prstGeom>
+          <a:solidFill>
+            <a:srgbClr val="F7F3EE"/>
+          </a:solidFill>
+          <a:ln w="15240">
+            <a:solidFill>
+              <a:srgbClr val="D6CCC1"/>
+            </a:solidFill>
+          </a:ln>
+        </p:spPr>
+        <p:style>
+          <a:lnRef idx="1">
+            <a:schemeClr val="accent1"/>
+          </a:lnRef>
+          <a:fillRef idx="3">
+            <a:schemeClr val="accent1"/>
+          </a:fillRef>
+          <a:effectRef idx="2">
+            <a:schemeClr val="accent1"/>
+          </a:effectRef>
+          <a:fontRef idx="minor">
+            <a:schemeClr val="lt1"/>
+          </a:fontRef>
+        </p:style>
+        <p:txBody>
+          <a:bodyPr rtlCol="0" anchor="ctr"/>
+          <a:lstStyle/>
+          <a:p>
+            <a:pPr algn="ctr"/>
           </a:p>
         </p:txBody>
       </p:sp>
       <p:pic>
         <p:nvPicPr>
-          <p:cNvPr id="3" name="Picture 2" descr="project-page.png"/>
+          <p:cNvPr id="9" name="Picture 8" descr="image.png"/>
           <p:cNvPicPr>
             <a:picLocks noChangeAspect="1"/>
           </p:cNvPicPr>
@@ -3644,17 +6010,191 @@
         </p:blipFill>
         <p:spPr>
           <a:xfrm>
-            <a:off x="594360" y="1417320"/>
-            <a:ext cx="3657600" cy="2103120"/>
+            <a:off x="886968" y="1984247"/>
+            <a:ext cx="3255264" cy="2523744"/>
           </a:xfrm>
           <a:prstGeom prst="rect">
             <a:avLst/>
           </a:prstGeom>
         </p:spPr>
       </p:pic>
+      <p:sp>
+        <p:nvSpPr>
+          <p:cNvPr id="10" name="Rounded Rectangle 9"/>
+          <p:cNvSpPr/>
+          <p:nvPr/>
+        </p:nvSpPr>
+        <p:spPr>
+          <a:xfrm>
+            <a:off x="960120" y="1728215"/>
+            <a:ext cx="1097280" cy="310896"/>
+          </a:xfrm>
+          <a:prstGeom prst="roundRect">
+            <a:avLst/>
+          </a:prstGeom>
+          <a:solidFill>
+            <a:srgbClr val="E86E3A"/>
+          </a:solidFill>
+          <a:ln>
+            <a:noFill/>
+          </a:ln>
+        </p:spPr>
+        <p:style>
+          <a:lnRef idx="1">
+            <a:schemeClr val="accent1"/>
+          </a:lnRef>
+          <a:fillRef idx="3">
+            <a:schemeClr val="accent1"/>
+          </a:fillRef>
+          <a:effectRef idx="2">
+            <a:schemeClr val="accent1"/>
+          </a:effectRef>
+          <a:fontRef idx="minor">
+            <a:schemeClr val="lt1"/>
+          </a:fontRef>
+        </p:style>
+        <p:txBody>
+          <a:bodyPr rtlCol="0" anchor="ctr" wrap="none"/>
+          <a:lstStyle/>
+          <a:p>
+            <a:pPr algn="ctr"/>
+            <a:r>
+              <a:rPr sz="900" b="1">
+                <a:solidFill>
+                  <a:srgbClr val="F4F0EB"/>
+                </a:solidFill>
+                <a:latin typeface="Aptos"/>
+              </a:rPr>
+              <a:t>1 PROJECT</a:t>
+            </a:r>
+          </a:p>
+        </p:txBody>
+      </p:sp>
+      <p:sp>
+        <p:nvSpPr>
+          <p:cNvPr id="11" name="TextBox 10"/>
+          <p:cNvSpPr txBox="1"/>
+          <p:nvPr/>
+        </p:nvSpPr>
+        <p:spPr>
+          <a:xfrm>
+            <a:off x="941832" y="4233671"/>
+            <a:ext cx="3145536" cy="201168"/>
+          </a:xfrm>
+          <a:prstGeom prst="rect">
+            <a:avLst/>
+          </a:prstGeom>
+          <a:noFill/>
+        </p:spPr>
+        <p:txBody>
+          <a:bodyPr wrap="none">
+            <a:spAutoFit/>
+          </a:bodyPr>
+          <a:lstStyle/>
+          <a:p>
+            <a:r>
+              <a:rPr sz="1000" b="1">
+                <a:solidFill>
+                  <a:srgbClr val="F4F0EB"/>
+                </a:solidFill>
+                <a:latin typeface="Aptos"/>
+              </a:rPr>
+              <a:t>Select `uav_relay_queue_project` and keep the scenario visible.</a:t>
+            </a:r>
+          </a:p>
+        </p:txBody>
+      </p:sp>
+      <p:sp>
+        <p:nvSpPr>
+          <p:cNvPr id="12" name="Rounded Rectangle 11"/>
+          <p:cNvSpPr/>
+          <p:nvPr/>
+        </p:nvSpPr>
+        <p:spPr>
+          <a:xfrm>
+            <a:off x="4434840" y="1947671"/>
+            <a:ext cx="3474720" cy="2743200"/>
+          </a:xfrm>
+          <a:prstGeom prst="roundRect">
+            <a:avLst/>
+          </a:prstGeom>
+          <a:solidFill>
+            <a:srgbClr val="12202D"/>
+          </a:solidFill>
+          <a:ln>
+            <a:noFill/>
+          </a:ln>
+        </p:spPr>
+        <p:style>
+          <a:lnRef idx="1">
+            <a:schemeClr val="accent1"/>
+          </a:lnRef>
+          <a:fillRef idx="3">
+            <a:schemeClr val="accent1"/>
+          </a:fillRef>
+          <a:effectRef idx="2">
+            <a:schemeClr val="accent1"/>
+          </a:effectRef>
+          <a:fontRef idx="minor">
+            <a:schemeClr val="lt1"/>
+          </a:fontRef>
+        </p:style>
+        <p:txBody>
+          <a:bodyPr rtlCol="0" anchor="ctr"/>
+          <a:lstStyle/>
+          <a:p>
+            <a:pPr algn="ctr"/>
+          </a:p>
+        </p:txBody>
+      </p:sp>
+      <p:sp>
+        <p:nvSpPr>
+          <p:cNvPr id="13" name="Rounded Rectangle 12"/>
+          <p:cNvSpPr/>
+          <p:nvPr/>
+        </p:nvSpPr>
+        <p:spPr>
+          <a:xfrm>
+            <a:off x="4370832" y="1874519"/>
+            <a:ext cx="3474720" cy="2743200"/>
+          </a:xfrm>
+          <a:prstGeom prst="roundRect">
+            <a:avLst/>
+          </a:prstGeom>
+          <a:solidFill>
+            <a:srgbClr val="F7F3EE"/>
+          </a:solidFill>
+          <a:ln w="15240">
+            <a:solidFill>
+              <a:srgbClr val="D6CCC1"/>
+            </a:solidFill>
+          </a:ln>
+        </p:spPr>
+        <p:style>
+          <a:lnRef idx="1">
+            <a:schemeClr val="accent1"/>
+          </a:lnRef>
+          <a:fillRef idx="3">
+            <a:schemeClr val="accent1"/>
+          </a:fillRef>
+          <a:effectRef idx="2">
+            <a:schemeClr val="accent1"/>
+          </a:effectRef>
+          <a:fontRef idx="minor">
+            <a:schemeClr val="lt1"/>
+          </a:fontRef>
+        </p:style>
+        <p:txBody>
+          <a:bodyPr rtlCol="0" anchor="ctr"/>
+          <a:lstStyle/>
+          <a:p>
+            <a:pPr algn="ctr"/>
+          </a:p>
+        </p:txBody>
+      </p:sp>
       <p:pic>
         <p:nvPicPr>
-          <p:cNvPr id="4" name="Picture 3" descr="orchestrate-page.png"/>
+          <p:cNvPr id="14" name="Picture 13" descr="image.png"/>
           <p:cNvPicPr>
             <a:picLocks noChangeAspect="1"/>
           </p:cNvPicPr>
@@ -3668,17 +6208,191 @@
         </p:blipFill>
         <p:spPr>
           <a:xfrm>
-            <a:off x="4279392" y="1417320"/>
-            <a:ext cx="3657600" cy="2103120"/>
+            <a:off x="4480560" y="1984247"/>
+            <a:ext cx="3255264" cy="2523744"/>
           </a:xfrm>
           <a:prstGeom prst="rect">
             <a:avLst/>
           </a:prstGeom>
         </p:spPr>
       </p:pic>
+      <p:sp>
+        <p:nvSpPr>
+          <p:cNvPr id="15" name="Rounded Rectangle 14"/>
+          <p:cNvSpPr/>
+          <p:nvPr/>
+        </p:nvSpPr>
+        <p:spPr>
+          <a:xfrm>
+            <a:off x="4553712" y="1728215"/>
+            <a:ext cx="1307592" cy="310896"/>
+          </a:xfrm>
+          <a:prstGeom prst="roundRect">
+            <a:avLst/>
+          </a:prstGeom>
+          <a:solidFill>
+            <a:srgbClr val="54B9D6"/>
+          </a:solidFill>
+          <a:ln>
+            <a:noFill/>
+          </a:ln>
+        </p:spPr>
+        <p:style>
+          <a:lnRef idx="1">
+            <a:schemeClr val="accent1"/>
+          </a:lnRef>
+          <a:fillRef idx="3">
+            <a:schemeClr val="accent1"/>
+          </a:fillRef>
+          <a:effectRef idx="2">
+            <a:schemeClr val="accent1"/>
+          </a:effectRef>
+          <a:fontRef idx="minor">
+            <a:schemeClr val="lt1"/>
+          </a:fontRef>
+        </p:style>
+        <p:txBody>
+          <a:bodyPr rtlCol="0" anchor="ctr" wrap="none"/>
+          <a:lstStyle/>
+          <a:p>
+            <a:pPr algn="ctr"/>
+            <a:r>
+              <a:rPr sz="900" b="1">
+                <a:solidFill>
+                  <a:srgbClr val="F4F0EB"/>
+                </a:solidFill>
+                <a:latin typeface="Aptos"/>
+              </a:rPr>
+              <a:t>2 ORCHESTRATE</a:t>
+            </a:r>
+          </a:p>
+        </p:txBody>
+      </p:sp>
+      <p:sp>
+        <p:nvSpPr>
+          <p:cNvPr id="16" name="TextBox 15"/>
+          <p:cNvSpPr txBox="1"/>
+          <p:nvPr/>
+        </p:nvSpPr>
+        <p:spPr>
+          <a:xfrm>
+            <a:off x="4535424" y="4233671"/>
+            <a:ext cx="3145536" cy="201168"/>
+          </a:xfrm>
+          <a:prstGeom prst="rect">
+            <a:avLst/>
+          </a:prstGeom>
+          <a:noFill/>
+        </p:spPr>
+        <p:txBody>
+          <a:bodyPr wrap="none">
+            <a:spAutoFit/>
+          </a:bodyPr>
+          <a:lstStyle/>
+          <a:p>
+            <a:r>
+              <a:rPr sz="1000" b="1">
+                <a:solidFill>
+                  <a:srgbClr val="F4F0EB"/>
+                </a:solidFill>
+                <a:latin typeface="Aptos"/>
+              </a:rPr>
+              <a:t>Trigger the run through one packaged path.</a:t>
+            </a:r>
+          </a:p>
+        </p:txBody>
+      </p:sp>
+      <p:sp>
+        <p:nvSpPr>
+          <p:cNvPr id="17" name="Rounded Rectangle 16"/>
+          <p:cNvSpPr/>
+          <p:nvPr/>
+        </p:nvSpPr>
+        <p:spPr>
+          <a:xfrm>
+            <a:off x="8028432" y="1947671"/>
+            <a:ext cx="3474720" cy="2743200"/>
+          </a:xfrm>
+          <a:prstGeom prst="roundRect">
+            <a:avLst/>
+          </a:prstGeom>
+          <a:solidFill>
+            <a:srgbClr val="12202D"/>
+          </a:solidFill>
+          <a:ln>
+            <a:noFill/>
+          </a:ln>
+        </p:spPr>
+        <p:style>
+          <a:lnRef idx="1">
+            <a:schemeClr val="accent1"/>
+          </a:lnRef>
+          <a:fillRef idx="3">
+            <a:schemeClr val="accent1"/>
+          </a:fillRef>
+          <a:effectRef idx="2">
+            <a:schemeClr val="accent1"/>
+          </a:effectRef>
+          <a:fontRef idx="minor">
+            <a:schemeClr val="lt1"/>
+          </a:fontRef>
+        </p:style>
+        <p:txBody>
+          <a:bodyPr rtlCol="0" anchor="ctr"/>
+          <a:lstStyle/>
+          <a:p>
+            <a:pPr algn="ctr"/>
+          </a:p>
+        </p:txBody>
+      </p:sp>
+      <p:sp>
+        <p:nvSpPr>
+          <p:cNvPr id="18" name="Rounded Rectangle 17"/>
+          <p:cNvSpPr/>
+          <p:nvPr/>
+        </p:nvSpPr>
+        <p:spPr>
+          <a:xfrm>
+            <a:off x="7964424" y="1874519"/>
+            <a:ext cx="3474720" cy="2743200"/>
+          </a:xfrm>
+          <a:prstGeom prst="roundRect">
+            <a:avLst/>
+          </a:prstGeom>
+          <a:solidFill>
+            <a:srgbClr val="F7F3EE"/>
+          </a:solidFill>
+          <a:ln w="15240">
+            <a:solidFill>
+              <a:srgbClr val="D6CCC1"/>
+            </a:solidFill>
+          </a:ln>
+        </p:spPr>
+        <p:style>
+          <a:lnRef idx="1">
+            <a:schemeClr val="accent1"/>
+          </a:lnRef>
+          <a:fillRef idx="3">
+            <a:schemeClr val="accent1"/>
+          </a:fillRef>
+          <a:effectRef idx="2">
+            <a:schemeClr val="accent1"/>
+          </a:effectRef>
+          <a:fontRef idx="minor">
+            <a:schemeClr val="lt1"/>
+          </a:fontRef>
+        </p:style>
+        <p:txBody>
+          <a:bodyPr rtlCol="0" anchor="ctr"/>
+          <a:lstStyle/>
+          <a:p>
+            <a:pPr algn="ctr"/>
+          </a:p>
+        </p:txBody>
+      </p:sp>
       <p:pic>
         <p:nvPicPr>
-          <p:cNvPr id="5" name="Picture 4" descr="pipeline-page.png"/>
+          <p:cNvPr id="19" name="Picture 18" descr="image.png"/>
           <p:cNvPicPr>
             <a:picLocks noChangeAspect="1"/>
           </p:cNvPicPr>
@@ -3692,8 +6406,8 @@
         </p:blipFill>
         <p:spPr>
           <a:xfrm>
-            <a:off x="7964424" y="1417320"/>
-            <a:ext cx="3657600" cy="2103120"/>
+            <a:off x="8074152" y="1984247"/>
+            <a:ext cx="3255264" cy="2523744"/>
           </a:xfrm>
           <a:prstGeom prst="rect">
             <a:avLst/>
@@ -3702,25 +6416,23 @@
       </p:pic>
       <p:sp>
         <p:nvSpPr>
-          <p:cNvPr id="6" name="Rounded Rectangle 5"/>
+          <p:cNvPr id="20" name="Rounded Rectangle 19"/>
           <p:cNvSpPr/>
           <p:nvPr/>
         </p:nvSpPr>
         <p:spPr>
           <a:xfrm>
-            <a:off x="640080" y="3840480"/>
-            <a:ext cx="10972800" cy="1965960"/>
+            <a:off x="8147304" y="1728215"/>
+            <a:ext cx="1097280" cy="310896"/>
           </a:xfrm>
           <a:prstGeom prst="roundRect">
             <a:avLst/>
           </a:prstGeom>
           <a:solidFill>
-            <a:srgbClr val="FFFBF5"/>
-          </a:solidFill>
-          <a:ln w="19050">
-            <a:solidFill>
-              <a:srgbClr val="DCCEBF"/>
-            </a:solidFill>
+            <a:srgbClr val="F5BF5B"/>
+          </a:solidFill>
+          <a:ln>
+            <a:noFill/>
           </a:ln>
         </p:spPr>
         <p:style>
@@ -3738,23 +6450,32 @@
           </a:fontRef>
         </p:style>
         <p:txBody>
-          <a:bodyPr rtlCol="0" anchor="ctr"/>
+          <a:bodyPr rtlCol="0" anchor="ctr" wrap="none"/>
           <a:lstStyle/>
           <a:p>
             <a:pPr algn="ctr"/>
-          </a:p>
-        </p:txBody>
-      </p:sp>
-      <p:sp>
-        <p:nvSpPr>
-          <p:cNvPr id="7" name="TextBox 6"/>
+            <a:r>
+              <a:rPr sz="900" b="1">
+                <a:solidFill>
+                  <a:srgbClr val="F4F0EB"/>
+                </a:solidFill>
+                <a:latin typeface="Aptos"/>
+              </a:rPr>
+              <a:t>3 PIPELINE</a:t>
+            </a:r>
+          </a:p>
+        </p:txBody>
+      </p:sp>
+      <p:sp>
+        <p:nvSpPr>
+          <p:cNvPr id="21" name="TextBox 20"/>
           <p:cNvSpPr txBox="1"/>
           <p:nvPr/>
         </p:nvSpPr>
         <p:spPr>
           <a:xfrm>
-            <a:off x="914400" y="4114800"/>
-            <a:ext cx="10332720" cy="1280160"/>
+            <a:off x="8129016" y="4233671"/>
+            <a:ext cx="3145536" cy="201168"/>
           </a:xfrm>
           <a:prstGeom prst="rect">
             <a:avLst/>
@@ -3762,38 +6483,137 @@
           <a:noFill/>
         </p:spPr>
         <p:txBody>
-          <a:bodyPr wrap="square">
+          <a:bodyPr wrap="none">
             <a:spAutoFit/>
           </a:bodyPr>
           <a:lstStyle/>
           <a:p>
-            <a:pPr>
+            <a:r>
+              <a:rPr sz="1000" b="1">
+                <a:solidFill>
+                  <a:srgbClr val="F4F0EB"/>
+                </a:solidFill>
+                <a:latin typeface="Aptos"/>
+              </a:rPr>
+              <a:t>Show that the execution path is tracked and replayable.</a:t>
+            </a:r>
+          </a:p>
+        </p:txBody>
+      </p:sp>
+      <p:sp>
+        <p:nvSpPr>
+          <p:cNvPr id="22" name="Rounded Rectangle 21"/>
+          <p:cNvSpPr/>
+          <p:nvPr/>
+        </p:nvSpPr>
+        <p:spPr>
+          <a:xfrm>
+            <a:off x="777240" y="4983480"/>
+            <a:ext cx="10652760" cy="914400"/>
+          </a:xfrm>
+          <a:prstGeom prst="roundRect">
+            <a:avLst/>
+          </a:prstGeom>
+          <a:solidFill>
+            <a:srgbClr val="F7F3EE"/>
+          </a:solidFill>
+          <a:ln w="15240">
+            <a:solidFill>
+              <a:srgbClr val="D6CCC1"/>
+            </a:solidFill>
+          </a:ln>
+        </p:spPr>
+        <p:style>
+          <a:lnRef idx="1">
+            <a:schemeClr val="accent1"/>
+          </a:lnRef>
+          <a:fillRef idx="3">
+            <a:schemeClr val="accent1"/>
+          </a:fillRef>
+          <a:effectRef idx="2">
+            <a:schemeClr val="accent1"/>
+          </a:effectRef>
+          <a:fontRef idx="minor">
+            <a:schemeClr val="lt1"/>
+          </a:fontRef>
+        </p:style>
+        <p:txBody>
+          <a:bodyPr rtlCol="0" anchor="ctr"/>
+          <a:lstStyle/>
+          <a:p>
+            <a:pPr algn="ctr"/>
+          </a:p>
+        </p:txBody>
+      </p:sp>
+      <p:sp>
+        <p:nvSpPr>
+          <p:cNvPr id="23" name="TextBox 22"/>
+          <p:cNvSpPr txBox="1"/>
+          <p:nvPr/>
+        </p:nvSpPr>
+        <p:spPr>
+          <a:xfrm>
+            <a:off x="987552" y="5184648"/>
+            <a:ext cx="10149840" cy="502920"/>
+          </a:xfrm>
+          <a:prstGeom prst="rect">
+            <a:avLst/>
+          </a:prstGeom>
+          <a:noFill/>
+        </p:spPr>
+        <p:txBody>
+          <a:bodyPr wrap="square" anchor="t">
+            <a:spAutoFit/>
+          </a:bodyPr>
+          <a:lstStyle/>
+          <a:p>
+            <a:pPr algn="l">
               <a:spcAft>
                 <a:spcPts val="800"/>
               </a:spcAft>
-              <a:defRPr sz="1800">
+            </a:pPr>
+            <a:r>
+              <a:rPr sz="1200" b="1">
                 <a:solidFill>
-                  <a:srgbClr val="212427"/>
+                  <a:srgbClr val="E86E3A"/>
                 </a:solidFill>
-              </a:defRPr>
-            </a:pPr>
-            <a:r>
-              <a:t>Select `uav_relay_queue_project` in PROJECT and keep the routing scenario visible.</a:t>
-            </a:r>
-          </a:p>
-          <a:p>
-            <a:pPr>
+                <a:latin typeface="Aptos"/>
+              </a:rPr>
+              <a:t>— </a:t>
+            </a:r>
+            <a:r>
+              <a:rPr sz="1200" b="0">
+                <a:solidFill>
+                  <a:srgbClr val="19212A"/>
+                </a:solidFill>
+                <a:latin typeface="Aptos"/>
+              </a:rPr>
+              <a:t>The deck works only if the viewer reads these as one route through the product, not as disconnected screens.</a:t>
+            </a:r>
+          </a:p>
+          <a:p>
+            <a:pPr algn="l">
               <a:spcAft>
                 <a:spcPts val="800"/>
               </a:spcAft>
-              <a:defRPr sz="1800">
+            </a:pPr>
+            <a:r>
+              <a:rPr sz="1200" b="1">
                 <a:solidFill>
-                  <a:srgbClr val="212427"/>
+                  <a:srgbClr val="E86E3A"/>
                 </a:solidFill>
-              </a:defRPr>
-            </a:pPr>
-            <a:r>
-              <a:t>Trigger the run in ORCHESTRATE, then move to PIPELINE to show that the execution path is tracked and replayable.</a:t>
+                <a:latin typeface="Aptos"/>
+              </a:rPr>
+              <a:t>— </a:t>
+            </a:r>
+            <a:r>
+              <a:rPr sz="1200" b="0">
+                <a:solidFill>
+                  <a:srgbClr val="19212A"/>
+                </a:solidFill>
+                <a:latin typeface="Aptos"/>
+              </a:rPr>
+              <a:t>That is why PIPELINE matters in the full tour and not in the newcomer-safe first proof.</a:t>
             </a:r>
           </a:p>
         </p:txBody>
@@ -3812,7 +6632,7 @@
     <p:bg>
       <p:bgPr>
         <a:solidFill>
-          <a:srgbClr val="F7F3EB"/>
+          <a:srgbClr val="0B131D"/>
         </a:solidFill>
         <a:effectLst/>
       </p:bgPr>
@@ -3826,14 +6646,143 @@
       <p:grpSpPr/>
       <p:sp>
         <p:nvSpPr>
-          <p:cNvPr id="2" name="TextBox 1"/>
+          <p:cNvPr id="2" name="Rectangle 1"/>
+          <p:cNvSpPr/>
+          <p:nvPr/>
+        </p:nvSpPr>
+        <p:spPr>
+          <a:xfrm>
+            <a:off x="0" y="0"/>
+            <a:ext cx="12191695" cy="146304"/>
+          </a:xfrm>
+          <a:prstGeom prst="rect">
+            <a:avLst/>
+          </a:prstGeom>
+          <a:solidFill>
+            <a:srgbClr val="E86E3A"/>
+          </a:solidFill>
+          <a:ln>
+            <a:noFill/>
+          </a:ln>
+        </p:spPr>
+        <p:style>
+          <a:lnRef idx="1">
+            <a:schemeClr val="accent1"/>
+          </a:lnRef>
+          <a:fillRef idx="3">
+            <a:schemeClr val="accent1"/>
+          </a:fillRef>
+          <a:effectRef idx="2">
+            <a:schemeClr val="accent1"/>
+          </a:effectRef>
+          <a:fontRef idx="minor">
+            <a:schemeClr val="lt1"/>
+          </a:fontRef>
+        </p:style>
+        <p:txBody>
+          <a:bodyPr rtlCol="0" anchor="ctr"/>
+          <a:lstStyle/>
+          <a:p>
+            <a:pPr algn="ctr"/>
+          </a:p>
+        </p:txBody>
+      </p:sp>
+      <p:sp>
+        <p:nvSpPr>
+          <p:cNvPr id="3" name="Oval 2"/>
+          <p:cNvSpPr/>
+          <p:nvPr/>
+        </p:nvSpPr>
+        <p:spPr>
+          <a:xfrm>
+            <a:off x="10607040" y="-731520"/>
+            <a:ext cx="2560320" cy="2560320"/>
+          </a:xfrm>
+          <a:prstGeom prst="ellipse">
+            <a:avLst/>
+          </a:prstGeom>
+          <a:solidFill>
+            <a:srgbClr val="12202D"/>
+          </a:solidFill>
+          <a:ln>
+            <a:noFill/>
+          </a:ln>
+        </p:spPr>
+        <p:style>
+          <a:lnRef idx="1">
+            <a:schemeClr val="accent1"/>
+          </a:lnRef>
+          <a:fillRef idx="3">
+            <a:schemeClr val="accent1"/>
+          </a:fillRef>
+          <a:effectRef idx="2">
+            <a:schemeClr val="accent1"/>
+          </a:effectRef>
+          <a:fontRef idx="minor">
+            <a:schemeClr val="lt1"/>
+          </a:fontRef>
+        </p:style>
+        <p:txBody>
+          <a:bodyPr rtlCol="0" anchor="ctr"/>
+          <a:lstStyle/>
+          <a:p>
+            <a:pPr algn="ctr"/>
+          </a:p>
+        </p:txBody>
+      </p:sp>
+      <p:sp>
+        <p:nvSpPr>
+          <p:cNvPr id="4" name="Oval 3"/>
+          <p:cNvSpPr/>
+          <p:nvPr/>
+        </p:nvSpPr>
+        <p:spPr>
+          <a:xfrm>
+            <a:off x="9966960" y="5120640"/>
+            <a:ext cx="2103120" cy="2103120"/>
+          </a:xfrm>
+          <a:prstGeom prst="ellipse">
+            <a:avLst/>
+          </a:prstGeom>
+          <a:solidFill>
+            <a:srgbClr val="1C2D3D"/>
+          </a:solidFill>
+          <a:ln>
+            <a:noFill/>
+          </a:ln>
+        </p:spPr>
+        <p:style>
+          <a:lnRef idx="1">
+            <a:schemeClr val="accent1"/>
+          </a:lnRef>
+          <a:fillRef idx="3">
+            <a:schemeClr val="accent1"/>
+          </a:fillRef>
+          <a:effectRef idx="2">
+            <a:schemeClr val="accent1"/>
+          </a:effectRef>
+          <a:fontRef idx="minor">
+            <a:schemeClr val="lt1"/>
+          </a:fontRef>
+        </p:style>
+        <p:txBody>
+          <a:bodyPr rtlCol="0" anchor="ctr"/>
+          <a:lstStyle/>
+          <a:p>
+            <a:pPr algn="ctr"/>
+          </a:p>
+        </p:txBody>
+      </p:sp>
+      <p:sp>
+        <p:nvSpPr>
+          <p:cNvPr id="5" name="TextBox 4"/>
           <p:cNvSpPr txBox="1"/>
           <p:nvPr/>
         </p:nvSpPr>
         <p:spPr>
           <a:xfrm>
-            <a:off x="640080" y="502920"/>
-            <a:ext cx="10972800" cy="1005840"/>
+            <a:off x="777240" y="658368"/>
+            <a:ext cx="2560320" cy="228600"/>
           </a:xfrm>
           <a:prstGeom prst="rect">
             <a:avLst/>
@@ -3846,35 +6795,172 @@
           </a:bodyPr>
           <a:lstStyle/>
           <a:p>
-            <a:r>
-              <a:rPr sz="2800" b="1">
+            <a:pPr algn="l">
+              <a:spcBef>
+                <a:spcPts val="0"/>
+              </a:spcBef>
+              <a:spcAft>
+                <a:spcPts val="0"/>
+              </a:spcAft>
+            </a:pPr>
+            <a:r>
+              <a:rPr sz="1000" b="1">
                 <a:solidFill>
-                  <a:srgbClr val="2D5C7A"/>
+                  <a:srgbClr val="54B9D6"/>
                 </a:solidFill>
+                <a:latin typeface="Aptos"/>
+              </a:rPr>
+              <a:t>TECHNICAL PAYOFF</a:t>
+            </a:r>
+          </a:p>
+        </p:txBody>
+      </p:sp>
+      <p:sp>
+        <p:nvSpPr>
+          <p:cNvPr id="6" name="TextBox 5"/>
+          <p:cNvSpPr txBox="1"/>
+          <p:nvPr/>
+        </p:nvSpPr>
+        <p:spPr>
+          <a:xfrm>
+            <a:off x="777240" y="868680"/>
+            <a:ext cx="4937760" cy="1371600"/>
+          </a:xfrm>
+          <a:prstGeom prst="rect">
+            <a:avLst/>
+          </a:prstGeom>
+          <a:noFill/>
+        </p:spPr>
+        <p:txBody>
+          <a:bodyPr wrap="square" anchor="t">
+            <a:spAutoFit/>
+          </a:bodyPr>
+          <a:lstStyle/>
+          <a:p>
+            <a:pPr algn="l">
+              <a:spcAft>
+                <a:spcPts val="300"/>
+              </a:spcAft>
+            </a:pPr>
+            <a:r>
+              <a:rPr sz="2600" b="1">
+                <a:solidFill>
+                  <a:srgbClr val="F4F0EB"/>
+                </a:solidFill>
+                <a:latin typeface="Aptos Display"/>
               </a:rPr>
               <a:t>End On Queue Evidence</a:t>
             </a:r>
           </a:p>
           <a:p>
-            <a:pPr>
+            <a:pPr algn="l">
               <a:spcBef>
-                <a:spcPts val="400"/>
+                <a:spcPts val="200"/>
               </a:spcBef>
             </a:pPr>
             <a:r>
-              <a:rPr sz="1400">
+              <a:rPr sz="1300" b="0">
                 <a:solidFill>
-                  <a:srgbClr val="5B6268"/>
+                  <a:srgbClr val="ABB7C4"/>
                 </a:solidFill>
+                <a:latin typeface="Aptos"/>
               </a:rPr>
-              <a:t>ANALYSIS carries the technical payoff of the full tour</a:t>
-            </a:r>
+              <a:t>ANALYSIS carries the technical payoff of the full tour.</a:t>
+            </a:r>
+          </a:p>
+        </p:txBody>
+      </p:sp>
+      <p:sp>
+        <p:nvSpPr>
+          <p:cNvPr id="7" name="Rounded Rectangle 6"/>
+          <p:cNvSpPr/>
+          <p:nvPr/>
+        </p:nvSpPr>
+        <p:spPr>
+          <a:xfrm>
+            <a:off x="841248" y="1764792"/>
+            <a:ext cx="6537960" cy="4297680"/>
+          </a:xfrm>
+          <a:prstGeom prst="roundRect">
+            <a:avLst/>
+          </a:prstGeom>
+          <a:solidFill>
+            <a:srgbClr val="12202D"/>
+          </a:solidFill>
+          <a:ln>
+            <a:noFill/>
+          </a:ln>
+        </p:spPr>
+        <p:style>
+          <a:lnRef idx="1">
+            <a:schemeClr val="accent1"/>
+          </a:lnRef>
+          <a:fillRef idx="3">
+            <a:schemeClr val="accent1"/>
+          </a:fillRef>
+          <a:effectRef idx="2">
+            <a:schemeClr val="accent1"/>
+          </a:effectRef>
+          <a:fontRef idx="minor">
+            <a:schemeClr val="lt1"/>
+          </a:fontRef>
+        </p:style>
+        <p:txBody>
+          <a:bodyPr rtlCol="0" anchor="ctr"/>
+          <a:lstStyle/>
+          <a:p>
+            <a:pPr algn="ctr"/>
+          </a:p>
+        </p:txBody>
+      </p:sp>
+      <p:sp>
+        <p:nvSpPr>
+          <p:cNvPr id="8" name="Rounded Rectangle 7"/>
+          <p:cNvSpPr/>
+          <p:nvPr/>
+        </p:nvSpPr>
+        <p:spPr>
+          <a:xfrm>
+            <a:off x="777240" y="1691640"/>
+            <a:ext cx="6537960" cy="4297680"/>
+          </a:xfrm>
+          <a:prstGeom prst="roundRect">
+            <a:avLst/>
+          </a:prstGeom>
+          <a:solidFill>
+            <a:srgbClr val="F7F3EE"/>
+          </a:solidFill>
+          <a:ln w="15240">
+            <a:solidFill>
+              <a:srgbClr val="D6CCC1"/>
+            </a:solidFill>
+          </a:ln>
+        </p:spPr>
+        <p:style>
+          <a:lnRef idx="1">
+            <a:schemeClr val="accent1"/>
+          </a:lnRef>
+          <a:fillRef idx="3">
+            <a:schemeClr val="accent1"/>
+          </a:fillRef>
+          <a:effectRef idx="2">
+            <a:schemeClr val="accent1"/>
+          </a:effectRef>
+          <a:fontRef idx="minor">
+            <a:schemeClr val="lt1"/>
+          </a:fontRef>
+        </p:style>
+        <p:txBody>
+          <a:bodyPr rtlCol="0" anchor="ctr"/>
+          <a:lstStyle/>
+          <a:p>
+            <a:pPr algn="ctr"/>
           </a:p>
         </p:txBody>
       </p:sp>
       <p:pic>
         <p:nvPicPr>
-          <p:cNvPr id="3" name="Picture 2" descr="core-pages-overview.png"/>
+          <p:cNvPr id="9" name="Picture 8" descr="image.png"/>
           <p:cNvPicPr>
             <a:picLocks noChangeAspect="1"/>
           </p:cNvPicPr>
@@ -3888,59 +6974,33 @@
         </p:blipFill>
         <p:spPr>
           <a:xfrm>
-            <a:off x="640080" y="1325880"/>
-            <a:ext cx="5486400" cy="3291840"/>
+            <a:off x="886968" y="1801368"/>
+            <a:ext cx="6318504" cy="4078224"/>
           </a:xfrm>
           <a:prstGeom prst="rect">
             <a:avLst/>
           </a:prstGeom>
         </p:spPr>
       </p:pic>
-      <p:pic>
-        <p:nvPicPr>
-          <p:cNvPr id="4" name="Picture 3" descr="analysis-page.png"/>
-          <p:cNvPicPr>
-            <a:picLocks noChangeAspect="1"/>
-          </p:cNvPicPr>
-          <p:nvPr/>
-        </p:nvPicPr>
-        <p:blipFill>
-          <a:blip r:embed="rId3"/>
-          <a:stretch>
-            <a:fillRect/>
-          </a:stretch>
-        </p:blipFill>
-        <p:spPr>
-          <a:xfrm>
-            <a:off x="6355080" y="1325880"/>
-            <a:ext cx="5074920" cy="2880360"/>
-          </a:xfrm>
-          <a:prstGeom prst="rect">
-            <a:avLst/>
-          </a:prstGeom>
-        </p:spPr>
-      </p:pic>
-      <p:sp>
-        <p:nvSpPr>
-          <p:cNvPr id="5" name="Rounded Rectangle 4"/>
+      <p:sp>
+        <p:nvSpPr>
+          <p:cNvPr id="10" name="Rounded Rectangle 9"/>
           <p:cNvSpPr/>
           <p:nvPr/>
         </p:nvSpPr>
         <p:spPr>
           <a:xfrm>
-            <a:off x="640080" y="4983480"/>
-            <a:ext cx="10972800" cy="1005840"/>
+            <a:off x="960120" y="1545336"/>
+            <a:ext cx="1097280" cy="310896"/>
           </a:xfrm>
           <a:prstGeom prst="roundRect">
             <a:avLst/>
           </a:prstGeom>
           <a:solidFill>
-            <a:srgbClr val="FFFBF5"/>
-          </a:solidFill>
-          <a:ln w="19050">
-            <a:solidFill>
-              <a:srgbClr val="DCCEBF"/>
-            </a:solidFill>
+            <a:srgbClr val="54B9D6"/>
+          </a:solidFill>
+          <a:ln>
+            <a:noFill/>
           </a:ln>
         </p:spPr>
         <p:style>
@@ -3958,6 +7018,92 @@
           </a:fontRef>
         </p:style>
         <p:txBody>
+          <a:bodyPr rtlCol="0" anchor="ctr" wrap="none"/>
+          <a:lstStyle/>
+          <a:p>
+            <a:pPr algn="ctr"/>
+            <a:r>
+              <a:rPr sz="900" b="1">
+                <a:solidFill>
+                  <a:srgbClr val="F4F0EB"/>
+                </a:solidFill>
+                <a:latin typeface="Aptos"/>
+              </a:rPr>
+              <a:t>ANALYSIS</a:t>
+            </a:r>
+          </a:p>
+        </p:txBody>
+      </p:sp>
+      <p:sp>
+        <p:nvSpPr>
+          <p:cNvPr id="11" name="TextBox 10"/>
+          <p:cNvSpPr txBox="1"/>
+          <p:nvPr/>
+        </p:nvSpPr>
+        <p:spPr>
+          <a:xfrm>
+            <a:off x="941832" y="5605272"/>
+            <a:ext cx="6208776" cy="201168"/>
+          </a:xfrm>
+          <a:prstGeom prst="rect">
+            <a:avLst/>
+          </a:prstGeom>
+          <a:noFill/>
+        </p:spPr>
+        <p:txBody>
+          <a:bodyPr wrap="none">
+            <a:spAutoFit/>
+          </a:bodyPr>
+          <a:lstStyle/>
+          <a:p>
+            <a:r>
+              <a:rPr sz="1000" b="1">
+                <a:solidFill>
+                  <a:srgbClr val="F4F0EB"/>
+                </a:solidFill>
+                <a:latin typeface="Aptos"/>
+              </a:rPr>
+              <a:t>Queue or route evidence is where the public tour becomes credible.</a:t>
+            </a:r>
+          </a:p>
+        </p:txBody>
+      </p:sp>
+      <p:sp>
+        <p:nvSpPr>
+          <p:cNvPr id="12" name="Rounded Rectangle 11"/>
+          <p:cNvSpPr/>
+          <p:nvPr/>
+        </p:nvSpPr>
+        <p:spPr>
+          <a:xfrm>
+            <a:off x="7699248" y="1901952"/>
+            <a:ext cx="3474720" cy="1417320"/>
+          </a:xfrm>
+          <a:prstGeom prst="roundRect">
+            <a:avLst/>
+          </a:prstGeom>
+          <a:solidFill>
+            <a:srgbClr val="12202D"/>
+          </a:solidFill>
+          <a:ln>
+            <a:noFill/>
+          </a:ln>
+        </p:spPr>
+        <p:style>
+          <a:lnRef idx="1">
+            <a:schemeClr val="accent1"/>
+          </a:lnRef>
+          <a:fillRef idx="3">
+            <a:schemeClr val="accent1"/>
+          </a:fillRef>
+          <a:effectRef idx="2">
+            <a:schemeClr val="accent1"/>
+          </a:effectRef>
+          <a:fontRef idx="minor">
+            <a:schemeClr val="lt1"/>
+          </a:fontRef>
+        </p:style>
+        <p:txBody>
           <a:bodyPr rtlCol="0" anchor="ctr"/>
           <a:lstStyle/>
           <a:p>
@@ -3967,14 +7113,102 @@
       </p:sp>
       <p:sp>
         <p:nvSpPr>
-          <p:cNvPr id="6" name="TextBox 5"/>
+          <p:cNvPr id="13" name="Rounded Rectangle 12"/>
+          <p:cNvSpPr/>
+          <p:nvPr/>
+        </p:nvSpPr>
+        <p:spPr>
+          <a:xfrm>
+            <a:off x="7635240" y="1828800"/>
+            <a:ext cx="3474720" cy="1417320"/>
+          </a:xfrm>
+          <a:prstGeom prst="roundRect">
+            <a:avLst/>
+          </a:prstGeom>
+          <a:solidFill>
+            <a:srgbClr val="F7F3EE"/>
+          </a:solidFill>
+          <a:ln w="15240">
+            <a:solidFill>
+              <a:srgbClr val="D6CCC1"/>
+            </a:solidFill>
+          </a:ln>
+        </p:spPr>
+        <p:style>
+          <a:lnRef idx="1">
+            <a:schemeClr val="accent1"/>
+          </a:lnRef>
+          <a:fillRef idx="3">
+            <a:schemeClr val="accent1"/>
+          </a:fillRef>
+          <a:effectRef idx="2">
+            <a:schemeClr val="accent1"/>
+          </a:effectRef>
+          <a:fontRef idx="minor">
+            <a:schemeClr val="lt1"/>
+          </a:fontRef>
+        </p:style>
+        <p:txBody>
+          <a:bodyPr rtlCol="0" anchor="ctr"/>
+          <a:lstStyle/>
+          <a:p>
+            <a:pPr algn="ctr"/>
+          </a:p>
+        </p:txBody>
+      </p:sp>
+      <p:sp>
+        <p:nvSpPr>
+          <p:cNvPr id="14" name="Rectangle 13"/>
+          <p:cNvSpPr/>
+          <p:nvPr/>
+        </p:nvSpPr>
+        <p:spPr>
+          <a:xfrm>
+            <a:off x="7635240" y="1828800"/>
+            <a:ext cx="118872" cy="1417320"/>
+          </a:xfrm>
+          <a:prstGeom prst="rect">
+            <a:avLst/>
+          </a:prstGeom>
+          <a:solidFill>
+            <a:srgbClr val="E86E3A"/>
+          </a:solidFill>
+          <a:ln>
+            <a:noFill/>
+          </a:ln>
+        </p:spPr>
+        <p:style>
+          <a:lnRef idx="1">
+            <a:schemeClr val="accent1"/>
+          </a:lnRef>
+          <a:fillRef idx="3">
+            <a:schemeClr val="accent1"/>
+          </a:fillRef>
+          <a:effectRef idx="2">
+            <a:schemeClr val="accent1"/>
+          </a:effectRef>
+          <a:fontRef idx="minor">
+            <a:schemeClr val="lt1"/>
+          </a:fontRef>
+        </p:style>
+        <p:txBody>
+          <a:bodyPr rtlCol="0" anchor="ctr"/>
+          <a:lstStyle/>
+          <a:p>
+            <a:pPr algn="ctr"/>
+          </a:p>
+        </p:txBody>
+      </p:sp>
+      <p:sp>
+        <p:nvSpPr>
+          <p:cNvPr id="15" name="TextBox 14"/>
           <p:cNvSpPr txBox="1"/>
           <p:nvPr/>
         </p:nvSpPr>
         <p:spPr>
           <a:xfrm>
-            <a:off x="914400" y="5212080"/>
-            <a:ext cx="10332720" cy="548640"/>
+            <a:off x="7891272" y="2011680"/>
+            <a:ext cx="3017520" cy="1143000"/>
           </a:xfrm>
           <a:prstGeom prst="rect">
             <a:avLst/>
@@ -3989,16 +7223,338 @@
           <a:p>
             <a:pPr>
               <a:spcAft>
-                <a:spcPts val="800"/>
+                <a:spcPts val="200"/>
               </a:spcAft>
-              <a:defRPr sz="1800">
+            </a:pPr>
+            <a:r>
+              <a:rPr sz="1400" b="1">
                 <a:solidFill>
-                  <a:srgbClr val="212427"/>
+                  <a:srgbClr val="19212A"/>
                 </a:solidFill>
-              </a:defRPr>
+                <a:latin typeface="Aptos Display"/>
+              </a:rPr>
+              <a:t>What the viewer should retain</a:t>
+            </a:r>
+          </a:p>
+          <a:p>
+            <a:r>
+              <a:rPr sz="1100" b="0">
+                <a:solidFill>
+                  <a:srgbClr val="57606D"/>
+                </a:solidFill>
+                <a:latin typeface="Aptos"/>
+              </a:rPr>
+              <a:t>AGILAB did not just execute a scenario. It kept the workflow explicit all the way to a readable technical result.</a:t>
+            </a:r>
+          </a:p>
+        </p:txBody>
+      </p:sp>
+      <p:sp>
+        <p:nvSpPr>
+          <p:cNvPr id="16" name="Rounded Rectangle 15"/>
+          <p:cNvSpPr/>
+          <p:nvPr/>
+        </p:nvSpPr>
+        <p:spPr>
+          <a:xfrm>
+            <a:off x="7699248" y="3529584"/>
+            <a:ext cx="3474720" cy="1417320"/>
+          </a:xfrm>
+          <a:prstGeom prst="roundRect">
+            <a:avLst/>
+          </a:prstGeom>
+          <a:solidFill>
+            <a:srgbClr val="12202D"/>
+          </a:solidFill>
+          <a:ln>
+            <a:noFill/>
+          </a:ln>
+        </p:spPr>
+        <p:style>
+          <a:lnRef idx="1">
+            <a:schemeClr val="accent1"/>
+          </a:lnRef>
+          <a:fillRef idx="3">
+            <a:schemeClr val="accent1"/>
+          </a:fillRef>
+          <a:effectRef idx="2">
+            <a:schemeClr val="accent1"/>
+          </a:effectRef>
+          <a:fontRef idx="minor">
+            <a:schemeClr val="lt1"/>
+          </a:fontRef>
+        </p:style>
+        <p:txBody>
+          <a:bodyPr rtlCol="0" anchor="ctr"/>
+          <a:lstStyle/>
+          <a:p>
+            <a:pPr algn="ctr"/>
+          </a:p>
+        </p:txBody>
+      </p:sp>
+      <p:sp>
+        <p:nvSpPr>
+          <p:cNvPr id="17" name="Rounded Rectangle 16"/>
+          <p:cNvSpPr/>
+          <p:nvPr/>
+        </p:nvSpPr>
+        <p:spPr>
+          <a:xfrm>
+            <a:off x="7635240" y="3456432"/>
+            <a:ext cx="3474720" cy="1417320"/>
+          </a:xfrm>
+          <a:prstGeom prst="roundRect">
+            <a:avLst/>
+          </a:prstGeom>
+          <a:solidFill>
+            <a:srgbClr val="F7F3EE"/>
+          </a:solidFill>
+          <a:ln w="15240">
+            <a:solidFill>
+              <a:srgbClr val="D6CCC1"/>
+            </a:solidFill>
+          </a:ln>
+        </p:spPr>
+        <p:style>
+          <a:lnRef idx="1">
+            <a:schemeClr val="accent1"/>
+          </a:lnRef>
+          <a:fillRef idx="3">
+            <a:schemeClr val="accent1"/>
+          </a:fillRef>
+          <a:effectRef idx="2">
+            <a:schemeClr val="accent1"/>
+          </a:effectRef>
+          <a:fontRef idx="minor">
+            <a:schemeClr val="lt1"/>
+          </a:fontRef>
+        </p:style>
+        <p:txBody>
+          <a:bodyPr rtlCol="0" anchor="ctr"/>
+          <a:lstStyle/>
+          <a:p>
+            <a:pPr algn="ctr"/>
+          </a:p>
+        </p:txBody>
+      </p:sp>
+      <p:sp>
+        <p:nvSpPr>
+          <p:cNvPr id="18" name="Rectangle 17"/>
+          <p:cNvSpPr/>
+          <p:nvPr/>
+        </p:nvSpPr>
+        <p:spPr>
+          <a:xfrm>
+            <a:off x="7635240" y="3456432"/>
+            <a:ext cx="118872" cy="1417320"/>
+          </a:xfrm>
+          <a:prstGeom prst="rect">
+            <a:avLst/>
+          </a:prstGeom>
+          <a:solidFill>
+            <a:srgbClr val="F5BF5B"/>
+          </a:solidFill>
+          <a:ln>
+            <a:noFill/>
+          </a:ln>
+        </p:spPr>
+        <p:style>
+          <a:lnRef idx="1">
+            <a:schemeClr val="accent1"/>
+          </a:lnRef>
+          <a:fillRef idx="3">
+            <a:schemeClr val="accent1"/>
+          </a:fillRef>
+          <a:effectRef idx="2">
+            <a:schemeClr val="accent1"/>
+          </a:effectRef>
+          <a:fontRef idx="minor">
+            <a:schemeClr val="lt1"/>
+          </a:fontRef>
+        </p:style>
+        <p:txBody>
+          <a:bodyPr rtlCol="0" anchor="ctr"/>
+          <a:lstStyle/>
+          <a:p>
+            <a:pPr algn="ctr"/>
+          </a:p>
+        </p:txBody>
+      </p:sp>
+      <p:sp>
+        <p:nvSpPr>
+          <p:cNvPr id="19" name="TextBox 18"/>
+          <p:cNvSpPr txBox="1"/>
+          <p:nvPr/>
+        </p:nvSpPr>
+        <p:spPr>
+          <a:xfrm>
+            <a:off x="7891272" y="3639312"/>
+            <a:ext cx="3017520" cy="1143000"/>
+          </a:xfrm>
+          <a:prstGeom prst="rect">
+            <a:avLst/>
+          </a:prstGeom>
+          <a:noFill/>
+        </p:spPr>
+        <p:txBody>
+          <a:bodyPr wrap="square">
+            <a:spAutoFit/>
+          </a:bodyPr>
+          <a:lstStyle/>
+          <a:p>
+            <a:pPr>
+              <a:spcAft>
+                <a:spcPts val="200"/>
+              </a:spcAft>
             </a:pPr>
             <a:r>
-              <a:t>The point of the full tour is not breadth for its own sake. It is that AGILAB keeps the workflow explicit all the way to queue or route evidence.</a:t>
+              <a:rPr sz="1400" b="1">
+                <a:solidFill>
+                  <a:srgbClr val="19212A"/>
+                </a:solidFill>
+                <a:latin typeface="Aptos Display"/>
+              </a:rPr>
+              <a:t>Why this deck exists</a:t>
+            </a:r>
+          </a:p>
+          <a:p>
+            <a:r>
+              <a:rPr sz="1100" b="0">
+                <a:solidFill>
+                  <a:srgbClr val="57606D"/>
+                </a:solidFill>
+                <a:latin typeface="Aptos"/>
+              </a:rPr>
+              <a:t>It gives the README and docs a skimmable public demo surface without requiring a hosted runtime or video playback.</a:t>
+            </a:r>
+          </a:p>
+        </p:txBody>
+      </p:sp>
+      <p:sp>
+        <p:nvSpPr>
+          <p:cNvPr id="20" name="Rounded Rectangle 19"/>
+          <p:cNvSpPr/>
+          <p:nvPr/>
+        </p:nvSpPr>
+        <p:spPr>
+          <a:xfrm>
+            <a:off x="7635240" y="5230368"/>
+            <a:ext cx="1097280" cy="310896"/>
+          </a:xfrm>
+          <a:prstGeom prst="roundRect">
+            <a:avLst/>
+          </a:prstGeom>
+          <a:solidFill>
+            <a:srgbClr val="54B9D6"/>
+          </a:solidFill>
+          <a:ln>
+            <a:noFill/>
+          </a:ln>
+        </p:spPr>
+        <p:style>
+          <a:lnRef idx="1">
+            <a:schemeClr val="accent1"/>
+          </a:lnRef>
+          <a:fillRef idx="3">
+            <a:schemeClr val="accent1"/>
+          </a:fillRef>
+          <a:effectRef idx="2">
+            <a:schemeClr val="accent1"/>
+          </a:effectRef>
+          <a:fontRef idx="minor">
+            <a:schemeClr val="lt1"/>
+          </a:fontRef>
+        </p:style>
+        <p:txBody>
+          <a:bodyPr rtlCol="0" anchor="ctr" wrap="none"/>
+          <a:lstStyle/>
+          <a:p>
+            <a:pPr algn="ctr"/>
+            <a:r>
+              <a:rPr sz="900" b="1">
+                <a:solidFill>
+                  <a:srgbClr val="F4F0EB"/>
+                </a:solidFill>
+                <a:latin typeface="Aptos"/>
+              </a:rPr>
+              <a:t>FULL TOUR</a:t>
+            </a:r>
+          </a:p>
+        </p:txBody>
+      </p:sp>
+      <p:sp>
+        <p:nvSpPr>
+          <p:cNvPr id="21" name="Rounded Rectangle 20"/>
+          <p:cNvSpPr/>
+          <p:nvPr/>
+        </p:nvSpPr>
+        <p:spPr>
+          <a:xfrm>
+            <a:off x="7635240" y="5577840"/>
+            <a:ext cx="3474720" cy="530352"/>
+          </a:xfrm>
+          <a:prstGeom prst="roundRect">
+            <a:avLst/>
+          </a:prstGeom>
+          <a:solidFill>
+            <a:srgbClr val="1C2D3D"/>
+          </a:solidFill>
+          <a:ln w="15240">
+            <a:noFill/>
+          </a:ln>
+        </p:spPr>
+        <p:style>
+          <a:lnRef idx="1">
+            <a:schemeClr val="accent1"/>
+          </a:lnRef>
+          <a:fillRef idx="3">
+            <a:schemeClr val="accent1"/>
+          </a:fillRef>
+          <a:effectRef idx="2">
+            <a:schemeClr val="accent1"/>
+          </a:effectRef>
+          <a:fontRef idx="minor">
+            <a:schemeClr val="lt1"/>
+          </a:fontRef>
+        </p:style>
+        <p:txBody>
+          <a:bodyPr rtlCol="0" anchor="ctr"/>
+          <a:lstStyle/>
+          <a:p>
+            <a:pPr algn="ctr"/>
+          </a:p>
+        </p:txBody>
+      </p:sp>
+      <p:sp>
+        <p:nvSpPr>
+          <p:cNvPr id="22" name="TextBox 21"/>
+          <p:cNvSpPr txBox="1"/>
+          <p:nvPr/>
+        </p:nvSpPr>
+        <p:spPr>
+          <a:xfrm>
+            <a:off x="7854696" y="5742432"/>
+            <a:ext cx="3035808" cy="310896"/>
+          </a:xfrm>
+          <a:prstGeom prst="rect">
+            <a:avLst/>
+          </a:prstGeom>
+          <a:noFill/>
+        </p:spPr>
+        <p:txBody>
+          <a:bodyPr wrap="square">
+            <a:spAutoFit/>
+          </a:bodyPr>
+          <a:lstStyle/>
+          <a:p>
+            <a:r>
+              <a:rPr sz="1200" b="0">
+                <a:solidFill>
+                  <a:srgbClr val="F4F0EB"/>
+                </a:solidFill>
+                <a:latin typeface="Aptos"/>
+              </a:rPr>
+              <a:t>The point of the full tour is not breadth for its own sake. It is explicit workflow plus visible queue evidence.</a:t>
             </a:r>
           </a:p>
         </p:txBody>
